--- a/Topic_E/Exam_Practice/TE-L06_Speaking_Workshop_Faith_Celebrations_and_Special_Occasions.pptx
+++ b/Topic_E/Exam_Practice/TE-L06_Speaking_Workshop_Faith_Celebrations_and_Special_Occasions.pptx
@@ -615,7 +615,11 @@
           <a:lstStyle/>
           <a:p>
             <a:r>
-              <a:rPr lang="en-US" dirty="0"/>
+              <a:rPr lang="ar-SA" dirty="0">
+                <a:latin typeface="Amiri" pitchFamily="2" charset="-78"/>
+                <a:ea typeface="Amiri" pitchFamily="2" charset="-78"/>
+                <a:cs typeface="Amiri" pitchFamily="2" charset="-78"/>
+              </a:rPr>
               <a:t>ROLE PLAY C (Develop) — a class presentation.
 SET-UP IN THE BREAKOUT ROOM: A = examiner (reads the left column ONLY — the questions, in order), B = candidate (sees the task column; Core may use the help column), C = observer (ticks the feedback checklist). 1 minute preparation, about 3 minutes speaking, 1 minute feedback, then rotate.
 Task ! is the unexpected question: in the exam the candidate has not seen it — the examiner should read it without warning.
@@ -707,7 +711,11 @@
           <a:lstStyle/>
           <a:p>
             <a:r>
-              <a:rPr lang="en-US" dirty="0"/>
+              <a:rPr lang="ar-SA" dirty="0">
+                <a:latin typeface="Amiri" pitchFamily="2" charset="-78"/>
+                <a:ea typeface="Amiri" pitchFamily="2" charset="-78"/>
+                <a:cs typeface="Amiri" pitchFamily="2" charset="-78"/>
+              </a:rPr>
               <a:t>ROLE PLAY D (Stretch) — a TV interview.
 SET-UP IN THE BREAKOUT ROOM: A = examiner (reads the left column ONLY — the questions, in order), B = candidate (sees the task column; Core may use the help column), C = observer (ticks the feedback checklist). 1 minute preparation, about 3 minutes speaking, 1 minute feedback, then rotate.
 Task ! is the unexpected question: in the exam the candidate has not seen it — the examiner should read it without warning.
@@ -1243,7 +1251,11 @@
           <a:lstStyle/>
           <a:p>
             <a:r>
-              <a:rPr lang="en-US" dirty="0"/>
+              <a:rPr lang="ar-SA" dirty="0">
+                <a:latin typeface="Amiri" pitchFamily="2" charset="-78"/>
+                <a:ea typeface="Amiri" pitchFamily="2" charset="-78"/>
+                <a:cs typeface="Amiri" pitchFamily="2" charset="-78"/>
+              </a:rPr>
               <a:t>TOPIC CONVERSATION — Core. Examiner asks the questions in order and may add “لِمَاذَا؟ / هَلْ يُمْكِنُ أَنْ تَشْرَحَ أَكْثَرَ؟” to push for more. Candidate aims for one full sentence per question.
 </a:t>
             </a:r>
@@ -1332,7 +1344,11 @@
           <a:lstStyle/>
           <a:p>
             <a:r>
-              <a:rPr lang="en-US" dirty="0"/>
+              <a:rPr lang="ar-SA" dirty="0">
+                <a:latin typeface="Amiri" pitchFamily="2" charset="-78"/>
+                <a:ea typeface="Amiri" pitchFamily="2" charset="-78"/>
+                <a:cs typeface="Amiri" pitchFamily="2" charset="-78"/>
+              </a:rPr>
               <a:t>TOPIC CONVERSATION — Develop. Examiner asks the questions in order and may add “لِمَاذَا؟ / هَلْ يُمْكِنُ أَنْ تَشْرَحَ أَكْثَرَ؟” to push for more. Candidate aims for two or three sentences, with sequence, two time frames and an object pronoun.
 </a:t>
             </a:r>
@@ -1421,7 +1437,11 @@
           <a:lstStyle/>
           <a:p>
             <a:r>
-              <a:rPr lang="en-US" dirty="0"/>
+              <a:rPr lang="ar-SA" dirty="0">
+                <a:latin typeface="Amiri" pitchFamily="2" charset="-78"/>
+                <a:ea typeface="Amiri" pitchFamily="2" charset="-78"/>
+                <a:cs typeface="Amiri" pitchFamily="2" charset="-78"/>
+              </a:rPr>
               <a:t>TOPIC CONVERSATION — Stretch. Examiner asks the questions in order and may add “لِمَاذَا؟ / هَلْ يُمْكِنُ أَنْ تَشْرَحَ أَكْثَرَ؟” to push for more. Candidate aims for a developed answer: opinion, balance, concession and a conditional.
 </a:t>
             </a:r>
@@ -1510,7 +1530,11 @@
           <a:lstStyle/>
           <a:p>
             <a:r>
-              <a:rPr lang="en-US" dirty="0"/>
+              <a:rPr lang="ar-SA" dirty="0">
+                <a:latin typeface="Amiri" pitchFamily="2" charset="-78"/>
+                <a:ea typeface="Amiri" pitchFamily="2" charset="-78"/>
+                <a:cs typeface="Amiri" pitchFamily="2" charset="-78"/>
+              </a:rPr>
               <a:t>WELCOME (1 min) — while students join.
 • Greet each student by name as they arrive: السَّلَامُ عَلَيْكُمْ. Take the register (Pastoral Tracker: attendance 0/1).
 • 2-MINUTE CHECK-IN (SEND training): a private chat to any student who seemed unsettled last lesson — “Are you okay today? 👍 / 👎”.
@@ -2224,7 +2248,11 @@
           <a:lstStyle/>
           <a:p>
             <a:r>
-              <a:rPr lang="en-US" dirty="0"/>
+              <a:rPr lang="ar-SA" dirty="0">
+                <a:latin typeface="Amiri" pitchFamily="2" charset="-78"/>
+                <a:ea typeface="Amiri" pitchFamily="2" charset="-78"/>
+                <a:cs typeface="Amiri" pitchFamily="2" charset="-78"/>
+              </a:rPr>
               <a:t>TEACH (3 min). Role play = precise and complete; conversation = develop. Choral repetition of the repair phrases. To a girl: تُعِيدِي.</a:t>
             </a:r>
             <a:endParaRPr lang="en-US" dirty="0"/>
@@ -2312,7 +2340,11 @@
           <a:lstStyle/>
           <a:p>
             <a:r>
-              <a:rPr lang="en-US" dirty="0"/>
+              <a:rPr lang="ar-SA" dirty="0">
+                <a:latin typeface="Amiri" pitchFamily="2" charset="-78"/>
+                <a:ea typeface="Amiri" pitchFamily="2" charset="-78"/>
+                <a:cs typeface="Amiri" pitchFamily="2" charset="-78"/>
+              </a:rPr>
               <a:t>LANGUAGE BANK (2 min) — the Eid day in order: أَوَّلًا نُصَلِّي صَلَاةَ العِيدِ، ثُمَّ نُفْطِرُ، بَعْدَ ذٰلِكَ نَزُورُ الأَقَارِبَ، وَأَخِيرًا نَخْرُجُ إِلَى الحَدِيقَةِ. Present for every year; past for "last Eid".</a:t>
             </a:r>
             <a:endParaRPr lang="en-US" dirty="0"/>
@@ -2400,7 +2432,11 @@
           <a:lstStyle/>
           <a:p>
             <a:r>
-              <a:rPr lang="en-US" dirty="0"/>
+              <a:rPr lang="ar-SA" dirty="0">
+                <a:latin typeface="Amiri" pitchFamily="2" charset="-78"/>
+                <a:ea typeface="Amiri" pitchFamily="2" charset="-78"/>
+                <a:cs typeface="Amiri" pitchFamily="2" charset="-78"/>
+              </a:rPr>
               <a:t>LANGUAGE BANK (2 min) — attach the object to the verb: اشْتَرَيْتُ الفُسْتَانَ → اشْتَرَيْتُهُ · زُرْنَا جَدَّتِي → زُرْنَاهَا · زُرْنَا أَقَارِبَنَا → زُرْنَاهُمْ. Two objects: أَهْدَتْنِي إِيَّاهُ (she gave it to me). Greetings: عِيدٌ مُبَارَكٌ · كُلُّ عَامٍ وَأَنْتُمْ بِخَيْرٍ.</a:t>
             </a:r>
             <a:endParaRPr lang="en-US" dirty="0"/>
@@ -2576,7 +2612,11 @@
           <a:lstStyle/>
           <a:p>
             <a:r>
-              <a:rPr lang="en-US" dirty="0"/>
+              <a:rPr lang="ar-SA" dirty="0">
+                <a:latin typeface="Amiri" pitchFamily="2" charset="-78"/>
+                <a:ea typeface="Amiri" pitchFamily="2" charset="-78"/>
+                <a:cs typeface="Amiri" pitchFamily="2" charset="-78"/>
+              </a:rPr>
               <a:t>ROLE PLAY A (Core) — Eid morning in the street.
 SET-UP IN THE BREAKOUT ROOM: A = examiner (reads the left column ONLY — the questions, in order), B = candidate (sees the task column; Core may use the help column), C = observer (ticks the feedback checklist). 1 minute preparation, about 3 minutes speaking, 1 minute feedback, then rotate.
 Task ! is the unexpected question: in the exam the candidate has not seen it — the examiner should read it without warning.
@@ -2668,7 +2708,11 @@
           <a:lstStyle/>
           <a:p>
             <a:r>
-              <a:rPr lang="en-US" dirty="0"/>
+              <a:rPr lang="ar-SA" dirty="0">
+                <a:latin typeface="Amiri" pitchFamily="2" charset="-78"/>
+                <a:ea typeface="Amiri" pitchFamily="2" charset="-78"/>
+                <a:cs typeface="Amiri" pitchFamily="2" charset="-78"/>
+              </a:rPr>
               <a:t>ROLE PLAY B (Core+) — at school.
 SET-UP IN THE BREAKOUT ROOM: A = examiner (reads the left column ONLY — the questions, in order), B = candidate (sees the task column; Core may use the help column), C = observer (ticks the feedback checklist). 1 minute preparation, about 3 minutes speaking, 1 minute feedback, then rotate.
 Task ! is the unexpected question: in the exam the candidate has not seen it — the examiner should read it without warning.
@@ -3156,6 +3200,7 @@
                   <a:srgbClr val="D4AF37"/>
                 </a:solidFill>
                 <a:latin typeface="Amiri" pitchFamily="2" charset="-78"/>
+                <a:ea typeface="Amiri" pitchFamily="2" charset="-78"/>
                 <a:cs typeface="Amiri" pitchFamily="2" charset="-78"/>
               </a:rPr>
               <a:t>م</a:t>
@@ -3362,6 +3407,7 @@
                   <a:srgbClr val="D4AF37"/>
                 </a:solidFill>
                 <a:latin typeface="Amiri" pitchFamily="2" charset="-78"/>
+                <a:ea typeface="Amiri" pitchFamily="2" charset="-78"/>
                 <a:cs typeface="Amiri" pitchFamily="2" charset="-78"/>
               </a:rPr>
               <a:t>وَرْشَةُ التَّحَدُّثِ — الأَعْيَادُ الدِّينِيَّةُ وَالمُنَاسَبَاتُ</a:t>
@@ -3413,6 +3459,7 @@
                   <a:srgbClr val="C6D2E6"/>
                 </a:solidFill>
                 <a:latin typeface="Amiri" pitchFamily="2" charset="-78"/>
+                <a:ea typeface="Amiri" pitchFamily="2" charset="-78"/>
                 <a:cs typeface="Amiri" pitchFamily="2" charset="-78"/>
               </a:rPr>
               <a:t>أَوَّلًا</a:t>
@@ -3439,6 +3486,7 @@
                   <a:srgbClr val="C6D2E6"/>
                 </a:solidFill>
                 <a:latin typeface="Amiri" pitchFamily="2" charset="-78"/>
+                <a:ea typeface="Amiri" pitchFamily="2" charset="-78"/>
                 <a:cs typeface="Amiri" pitchFamily="2" charset="-78"/>
               </a:rPr>
               <a:t>ثُمَّ</a:t>
@@ -3465,6 +3513,7 @@
                   <a:srgbClr val="C6D2E6"/>
                 </a:solidFill>
                 <a:latin typeface="Amiri" pitchFamily="2" charset="-78"/>
+                <a:ea typeface="Amiri" pitchFamily="2" charset="-78"/>
                 <a:cs typeface="Amiri" pitchFamily="2" charset="-78"/>
               </a:rPr>
               <a:t>بَعْدَ ذٰلِكَ</a:t>
@@ -3491,6 +3540,7 @@
                   <a:srgbClr val="C6D2E6"/>
                 </a:solidFill>
                 <a:latin typeface="Amiri" pitchFamily="2" charset="-78"/>
+                <a:ea typeface="Amiri" pitchFamily="2" charset="-78"/>
                 <a:cs typeface="Amiri" pitchFamily="2" charset="-78"/>
               </a:rPr>
               <a:t>أَخِيرًا</a:t>
@@ -3517,6 +3567,7 @@
                   <a:srgbClr val="C6D2E6"/>
                 </a:solidFill>
                 <a:latin typeface="Amiri" pitchFamily="2" charset="-78"/>
+                <a:ea typeface="Amiri" pitchFamily="2" charset="-78"/>
                 <a:cs typeface="Amiri" pitchFamily="2" charset="-78"/>
               </a:rPr>
               <a:t>زُرْنَاهُمْ</a:t>
@@ -3543,6 +3594,7 @@
                   <a:srgbClr val="C6D2E6"/>
                 </a:solidFill>
                 <a:latin typeface="Amiri" pitchFamily="2" charset="-78"/>
+                <a:ea typeface="Amiri" pitchFamily="2" charset="-78"/>
                 <a:cs typeface="Amiri" pitchFamily="2" charset="-78"/>
               </a:rPr>
               <a:t>اشْتَرَيْتُهَا</a:t>
@@ -3975,6 +4027,7 @@
                   <a:srgbClr val="D4AF37"/>
                 </a:solidFill>
                 <a:latin typeface="Amiri" pitchFamily="2" charset="-78"/>
+                <a:ea typeface="Amiri" pitchFamily="2" charset="-78"/>
                 <a:cs typeface="Amiri" pitchFamily="2" charset="-78"/>
               </a:rPr>
               <a:t>م</a:t>
@@ -4295,6 +4348,7 @@
                   <a:srgbClr val="8A6D1E"/>
                 </a:solidFill>
                 <a:latin typeface="Amiri" pitchFamily="2" charset="-78"/>
+                <a:ea typeface="Amiri" pitchFamily="2" charset="-78"/>
                 <a:cs typeface="Amiri" pitchFamily="2" charset="-78"/>
               </a:rPr>
               <a:t>العِيدُ المَاضِي خُطْوَةً خُطْوَةً</a:t>
@@ -4575,6 +4629,7 @@
                   <a:srgbClr val="1B3B6F"/>
                 </a:solidFill>
                 <a:latin typeface="Amiri" pitchFamily="2" charset="-78"/>
+                <a:ea typeface="Amiri" pitchFamily="2" charset="-78"/>
                 <a:cs typeface="Amiri" pitchFamily="2" charset="-78"/>
               </a:rPr>
               <a:t>اشْتَرَيْنَا … وَ… ثُمَّ …</a:t>
@@ -4651,6 +4706,7 @@
                   <a:srgbClr val="1B3B6F"/>
                 </a:solidFill>
                 <a:latin typeface="Amiri" pitchFamily="2" charset="-78"/>
+                <a:ea typeface="Amiri" pitchFamily="2" charset="-78"/>
                 <a:cs typeface="Amiri" pitchFamily="2" charset="-78"/>
               </a:rPr>
               <a:t>كَيْفَ اسْتَعْدَدْتُمْ لِلْعِيدِ الأَخِيرِ؟</a:t>
@@ -4754,6 +4810,7 @@
                   <a:srgbClr val="1B3B6F"/>
                 </a:solidFill>
                 <a:latin typeface="Amiri" pitchFamily="2" charset="-78"/>
+                <a:ea typeface="Amiri" pitchFamily="2" charset="-78"/>
                 <a:cs typeface="Amiri" pitchFamily="2" charset="-78"/>
               </a:rPr>
               <a:t>أَوَّلًا … ثُمَّ … بَعْدَ ذٰلِكَ … وَأَخِيرًا …</a:t>
@@ -4830,6 +4887,7 @@
                   <a:srgbClr val="1B3B6F"/>
                 </a:solidFill>
                 <a:latin typeface="Amiri" pitchFamily="2" charset="-78"/>
+                <a:ea typeface="Amiri" pitchFamily="2" charset="-78"/>
                 <a:cs typeface="Amiri" pitchFamily="2" charset="-78"/>
               </a:rPr>
               <a:t>وَيَوْمُ العِيدِ نَفْسُهُ؟</a:t>
@@ -4933,6 +4991,7 @@
                   <a:srgbClr val="1B3B6F"/>
                 </a:solidFill>
                 <a:latin typeface="Amiri" pitchFamily="2" charset="-78"/>
+                <a:ea typeface="Amiri" pitchFamily="2" charset="-78"/>
                 <a:cs typeface="Amiri" pitchFamily="2" charset="-78"/>
               </a:rPr>
               <a:t>عِنْدَمَا كُنْتُ صَغِيرًا كُنَّا … أَمَّا الآنَ فَنَحْتَفِلُ …</a:t>
@@ -5009,6 +5068,7 @@
                   <a:srgbClr val="1B3B6F"/>
                 </a:solidFill>
                 <a:latin typeface="Amiri" pitchFamily="2" charset="-78"/>
+                <a:ea typeface="Amiri" pitchFamily="2" charset="-78"/>
                 <a:cs typeface="Amiri" pitchFamily="2" charset="-78"/>
               </a:rPr>
               <a:t>هَلْ يَخْتَلِفُ العِيدُ الآنَ عَنِ العِيدِ فِي طُفُولَتِكَ؟</a:t>
@@ -5112,6 +5172,7 @@
                   <a:srgbClr val="1B3B6F"/>
                 </a:solidFill>
                 <a:latin typeface="Amiri" pitchFamily="2" charset="-78"/>
+                <a:ea typeface="Amiri" pitchFamily="2" charset="-78"/>
                 <a:cs typeface="Amiri" pitchFamily="2" charset="-78"/>
               </a:rPr>
               <a:t>أَهْدَانِي … إِيَّاهُ / أَهْدَتْنِي …</a:t>
@@ -5188,6 +5249,7 @@
                   <a:srgbClr val="1B3B6F"/>
                 </a:solidFill>
                 <a:latin typeface="Amiri" pitchFamily="2" charset="-78"/>
+                <a:ea typeface="Amiri" pitchFamily="2" charset="-78"/>
                 <a:cs typeface="Amiri" pitchFamily="2" charset="-78"/>
               </a:rPr>
               <a:t>مَا أَجْمَلُ هَدِيَّةٍ أَخَذْتَهَا؟</a:t>
@@ -5291,6 +5353,7 @@
                   <a:srgbClr val="1B3B6F"/>
                 </a:solidFill>
                 <a:latin typeface="Amiri" pitchFamily="2" charset="-78"/>
+                <a:ea typeface="Amiri" pitchFamily="2" charset="-78"/>
                 <a:cs typeface="Amiri" pitchFamily="2" charset="-78"/>
               </a:rPr>
               <a:t>سَأُنَظِّمُ … لِكَيْ …</a:t>
@@ -5367,6 +5430,7 @@
                   <a:srgbClr val="1B3B6F"/>
                 </a:solidFill>
                 <a:latin typeface="Amiri" pitchFamily="2" charset="-78"/>
+                <a:ea typeface="Amiri" pitchFamily="2" charset="-78"/>
                 <a:cs typeface="Amiri" pitchFamily="2" charset="-78"/>
               </a:rPr>
               <a:t>كَيْفَ سَتَحْتَفِلُ بِالعِيدِ القَادِمِ؟</a:t>
@@ -5576,6 +5640,7 @@
                   <a:srgbClr val="D4AF37"/>
                 </a:solidFill>
                 <a:latin typeface="Amiri" pitchFamily="2" charset="-78"/>
+                <a:ea typeface="Amiri" pitchFamily="2" charset="-78"/>
                 <a:cs typeface="Amiri" pitchFamily="2" charset="-78"/>
               </a:rPr>
               <a:t>م</a:t>
@@ -5896,6 +5961,7 @@
                   <a:srgbClr val="8A6D1E"/>
                 </a:solidFill>
                 <a:latin typeface="Amiri" pitchFamily="2" charset="-78"/>
+                <a:ea typeface="Amiri" pitchFamily="2" charset="-78"/>
                 <a:cs typeface="Amiri" pitchFamily="2" charset="-78"/>
               </a:rPr>
               <a:t>الأَعْيَادُ فِي مُجْتَمَعٍ مُتَنَوِّعٍ</a:t>
@@ -6176,6 +6242,7 @@
                   <a:srgbClr val="1B3B6F"/>
                 </a:solidFill>
                 <a:latin typeface="Amiri" pitchFamily="2" charset="-78"/>
+                <a:ea typeface="Amiri" pitchFamily="2" charset="-78"/>
                 <a:cs typeface="Amiri" pitchFamily="2" charset="-78"/>
               </a:rPr>
               <a:t>لَيْسَ … بَلْ …</a:t>
@@ -6252,6 +6319,7 @@
                   <a:srgbClr val="1B3B6F"/>
                 </a:solidFill>
                 <a:latin typeface="Amiri" pitchFamily="2" charset="-78"/>
+                <a:ea typeface="Amiri" pitchFamily="2" charset="-78"/>
                 <a:cs typeface="Amiri" pitchFamily="2" charset="-78"/>
               </a:rPr>
               <a:t>مَا الَّذِي يَجْعَلُ العِيدَ مُمَيَّزًا بِالنِّسْبَةِ إِلَيْكَ؟</a:t>
@@ -6355,6 +6423,7 @@
                   <a:srgbClr val="1B3B6F"/>
                 </a:solidFill>
                 <a:latin typeface="Amiri" pitchFamily="2" charset="-78"/>
+                <a:ea typeface="Amiri" pitchFamily="2" charset="-78"/>
                 <a:cs typeface="Amiri" pitchFamily="2" charset="-78"/>
               </a:rPr>
               <a:t>نَعَمْ، أُهَنِّئُ … ؛ مَثَلًا، فِي …</a:t>
@@ -6431,6 +6500,7 @@
                   <a:srgbClr val="1B3B6F"/>
                 </a:solidFill>
                 <a:latin typeface="Amiri" pitchFamily="2" charset="-78"/>
+                <a:ea typeface="Amiri" pitchFamily="2" charset="-78"/>
                 <a:cs typeface="Amiri" pitchFamily="2" charset="-78"/>
               </a:rPr>
               <a:t>هَلْ تُشَارِكُ فِي أَعْيَادِ غَيْرِكَ؟</a:t>
@@ -6534,6 +6604,7 @@
                   <a:srgbClr val="1B3B6F"/>
                 </a:solidFill>
                 <a:latin typeface="Amiri" pitchFamily="2" charset="-78"/>
+                <a:ea typeface="Amiri" pitchFamily="2" charset="-78"/>
                 <a:cs typeface="Amiri" pitchFamily="2" charset="-78"/>
               </a:rPr>
               <a:t>صَحِيحٌ أَنَّ … غَيْرَ أَنَّ … مِمَّا …</a:t>
@@ -6610,6 +6681,7 @@
                   <a:srgbClr val="1B3B6F"/>
                 </a:solidFill>
                 <a:latin typeface="Amiri" pitchFamily="2" charset="-78"/>
+                <a:ea typeface="Amiri" pitchFamily="2" charset="-78"/>
                 <a:cs typeface="Amiri" pitchFamily="2" charset="-78"/>
               </a:rPr>
               <a:t>يَقُولُ البَعْضُ إِنَّ الأَعْيَادَ صَارَتْ تِجَارِيَّةً.</a:t>
@@ -6713,6 +6785,7 @@
                   <a:srgbClr val="1B3B6F"/>
                 </a:solidFill>
                 <a:latin typeface="Amiri" pitchFamily="2" charset="-78"/>
+                <a:ea typeface="Amiri" pitchFamily="2" charset="-78"/>
                 <a:cs typeface="Amiri" pitchFamily="2" charset="-78"/>
               </a:rPr>
               <a:t>كَانُوا … ، وَكَانَ … ؛ أَمَّا نَحْنُ فَنَشْتَرِي …</a:t>
@@ -6789,6 +6862,7 @@
                   <a:srgbClr val="1B3B6F"/>
                 </a:solidFill>
                 <a:latin typeface="Amiri" pitchFamily="2" charset="-78"/>
+                <a:ea typeface="Amiri" pitchFamily="2" charset="-78"/>
                 <a:cs typeface="Amiri" pitchFamily="2" charset="-78"/>
               </a:rPr>
               <a:t>كَيْفَ كَانَ أَجْدَادُكَ يَحْتَفِلُونَ؟</a:t>
@@ -6892,6 +6966,7 @@
                   <a:srgbClr val="1B3B6F"/>
                 </a:solidFill>
                 <a:latin typeface="Amiri" pitchFamily="2" charset="-78"/>
+                <a:ea typeface="Amiri" pitchFamily="2" charset="-78"/>
                 <a:cs typeface="Amiri" pitchFamily="2" charset="-78"/>
               </a:rPr>
               <a:t>لَوْ أَضَفْتُ عَادَةً، لَدَعَوْنَا … لِكَيْ …</a:t>
@@ -6968,6 +7043,7 @@
                   <a:srgbClr val="1B3B6F"/>
                 </a:solidFill>
                 <a:latin typeface="Amiri" pitchFamily="2" charset="-78"/>
+                <a:ea typeface="Amiri" pitchFamily="2" charset="-78"/>
                 <a:cs typeface="Amiri" pitchFamily="2" charset="-78"/>
               </a:rPr>
               <a:t>لَوْ أَضَفْتَ عَادَةً جَدِيدَةً إِلَى العِيدِ، فَمَا هِيَ؟</a:t>
@@ -7177,6 +7253,7 @@
                   <a:srgbClr val="D4AF37"/>
                 </a:solidFill>
                 <a:latin typeface="Amiri" pitchFamily="2" charset="-78"/>
+                <a:ea typeface="Amiri" pitchFamily="2" charset="-78"/>
                 <a:cs typeface="Amiri" pitchFamily="2" charset="-78"/>
               </a:rPr>
               <a:t>م</a:t>
@@ -7497,6 +7574,7 @@
                   <a:srgbClr val="8A6D1E"/>
                 </a:solidFill>
                 <a:latin typeface="Amiri" pitchFamily="2" charset="-78"/>
+                <a:ea typeface="Amiri" pitchFamily="2" charset="-78"/>
                 <a:cs typeface="Amiri" pitchFamily="2" charset="-78"/>
               </a:rPr>
               <a:t>وَرَقَةُ المُلَاحِظِ</a:t>
@@ -8967,6 +9045,7 @@
                   <a:srgbClr val="D4AF37"/>
                 </a:solidFill>
                 <a:latin typeface="Amiri" pitchFamily="2" charset="-78"/>
+                <a:ea typeface="Amiri" pitchFamily="2" charset="-78"/>
                 <a:cs typeface="Amiri" pitchFamily="2" charset="-78"/>
               </a:rPr>
               <a:t>م</a:t>
@@ -9287,6 +9366,7 @@
                   <a:srgbClr val="8A6D1E"/>
                 </a:solidFill>
                 <a:latin typeface="Amiri" pitchFamily="2" charset="-78"/>
+                <a:ea typeface="Amiri" pitchFamily="2" charset="-78"/>
                 <a:cs typeface="Amiri" pitchFamily="2" charset="-78"/>
               </a:rPr>
               <a:t>نَمُوذَجُ الإِجَابَةِ</a:t>
@@ -9529,6 +9609,7 @@
                   <a:srgbClr val="1B3B6F"/>
                 </a:solidFill>
                 <a:latin typeface="Amiri" pitchFamily="2" charset="-78"/>
+                <a:ea typeface="Amiri" pitchFamily="2" charset="-78"/>
                 <a:cs typeface="Amiri" pitchFamily="2" charset="-78"/>
               </a:rPr>
               <a:t>شُكْرًا! اليَوْمَ عِيدُ الفِطْرِ.</a:t>
@@ -9605,6 +9686,7 @@
                   <a:srgbClr val="1B3B6F"/>
                 </a:solidFill>
                 <a:latin typeface="Amiri" pitchFamily="2" charset="-78"/>
+                <a:ea typeface="Amiri" pitchFamily="2" charset="-78"/>
                 <a:cs typeface="Amiri" pitchFamily="2" charset="-78"/>
               </a:rPr>
               <a:t>صَبَاحَ الخَيْرِ! تَبْدُو جَمِيلًا اليَوْمَ!</a:t>
@@ -9708,6 +9790,7 @@
                   <a:srgbClr val="1B3B6F"/>
                 </a:solidFill>
                 <a:latin typeface="Amiri" pitchFamily="2" charset="-78"/>
+                <a:ea typeface="Amiri" pitchFamily="2" charset="-78"/>
                 <a:cs typeface="Amiri" pitchFamily="2" charset="-78"/>
               </a:rPr>
               <a:t>أَوَّلًا نُصَلِّي فِي المَسْجِدِ، ثُمَّ نَزُورُ جَدَّتِي.</a:t>
@@ -9784,6 +9867,7 @@
                   <a:srgbClr val="1B3B6F"/>
                 </a:solidFill>
                 <a:latin typeface="Amiri" pitchFamily="2" charset="-78"/>
+                <a:ea typeface="Amiri" pitchFamily="2" charset="-78"/>
                 <a:cs typeface="Amiri" pitchFamily="2" charset="-78"/>
               </a:rPr>
               <a:t>مَاذَا تَفْعَلُونَ فِي العِيدِ؟</a:t>
@@ -9887,6 +9971,7 @@
                   <a:srgbClr val="1B3B6F"/>
                 </a:solidFill>
                 <a:latin typeface="Amiri" pitchFamily="2" charset="-78"/>
+                <a:ea typeface="Amiri" pitchFamily="2" charset="-78"/>
                 <a:cs typeface="Amiri" pitchFamily="2" charset="-78"/>
               </a:rPr>
               <a:t>نَأْكُلُ الكَعْكَ وَالمَعْمُولَ.</a:t>
@@ -9963,6 +10048,7 @@
                   <a:srgbClr val="1B3B6F"/>
                 </a:solidFill>
                 <a:latin typeface="Amiri" pitchFamily="2" charset="-78"/>
+                <a:ea typeface="Amiri" pitchFamily="2" charset="-78"/>
                 <a:cs typeface="Amiri" pitchFamily="2" charset="-78"/>
               </a:rPr>
               <a:t>وَمَاذَا تَأْكُلُونَ؟</a:t>
@@ -10066,6 +10152,7 @@
                   <a:srgbClr val="1B3B6F"/>
                 </a:solidFill>
                 <a:latin typeface="Amiri" pitchFamily="2" charset="-78"/>
+                <a:ea typeface="Amiri" pitchFamily="2" charset="-78"/>
                 <a:cs typeface="Amiri" pitchFamily="2" charset="-78"/>
               </a:rPr>
               <a:t>شُكْرًا! تَفَضَّلْ، هٰذَا مَعْمُولٌ مِنْ أُمِّي.</a:t>
@@ -10142,6 +10229,7 @@
                   <a:srgbClr val="1B3B6F"/>
                 </a:solidFill>
                 <a:latin typeface="Amiri" pitchFamily="2" charset="-78"/>
+                <a:ea typeface="Amiri" pitchFamily="2" charset="-78"/>
                 <a:cs typeface="Amiri" pitchFamily="2" charset="-78"/>
               </a:rPr>
               <a:t>لَذِيذٌ! عِيدٌ سَعِيدٌ لَكُمْ.</a:t>
@@ -10245,6 +10333,7 @@
                   <a:srgbClr val="1B3B6F"/>
                 </a:solidFill>
                 <a:latin typeface="Amiri" pitchFamily="2" charset="-78"/>
+                <a:ea typeface="Amiri" pitchFamily="2" charset="-78"/>
                 <a:cs typeface="Amiri" pitchFamily="2" charset="-78"/>
               </a:rPr>
               <a:t>نَعَمْ، آخُذُ عِيدِيَّةً مِنْ جَدِّي.</a:t>
@@ -10321,6 +10410,7 @@
                   <a:srgbClr val="1B3B6F"/>
                 </a:solidFill>
                 <a:latin typeface="Amiri" pitchFamily="2" charset="-78"/>
+                <a:ea typeface="Amiri" pitchFamily="2" charset="-78"/>
                 <a:cs typeface="Amiri" pitchFamily="2" charset="-78"/>
               </a:rPr>
               <a:t>مَا أَلْطَفَكُمْ! هَلْ تَأْخُذُ هَدَايَا فِي العِيدِ؟</a:t>
@@ -10530,6 +10620,7 @@
                   <a:srgbClr val="D4AF37"/>
                 </a:solidFill>
                 <a:latin typeface="Amiri" pitchFamily="2" charset="-78"/>
+                <a:ea typeface="Amiri" pitchFamily="2" charset="-78"/>
                 <a:cs typeface="Amiri" pitchFamily="2" charset="-78"/>
               </a:rPr>
               <a:t>م</a:t>
@@ -10850,6 +10941,7 @@
                   <a:srgbClr val="8A6D1E"/>
                 </a:solidFill>
                 <a:latin typeface="Amiri" pitchFamily="2" charset="-78"/>
+                <a:ea typeface="Amiri" pitchFamily="2" charset="-78"/>
                 <a:cs typeface="Amiri" pitchFamily="2" charset="-78"/>
               </a:rPr>
               <a:t>نَمُوذَجُ الإِجَابَةِ</a:t>
@@ -11092,6 +11184,7 @@
                   <a:srgbClr val="1B3B6F"/>
                 </a:solidFill>
                 <a:latin typeface="Amiri" pitchFamily="2" charset="-78"/>
+                <a:ea typeface="Amiri" pitchFamily="2" charset="-78"/>
                 <a:cs typeface="Amiri" pitchFamily="2" charset="-78"/>
               </a:rPr>
               <a:t>نَعَمْ، أَصُومُ مِنَ الفَجْرِ إِلَى المَغْرِبِ.</a:t>
@@ -11168,6 +11261,7 @@
                   <a:srgbClr val="1B3B6F"/>
                 </a:solidFill>
                 <a:latin typeface="Amiri" pitchFamily="2" charset="-78"/>
+                <a:ea typeface="Amiri" pitchFamily="2" charset="-78"/>
                 <a:cs typeface="Amiri" pitchFamily="2" charset="-78"/>
               </a:rPr>
               <a:t>هَلْ أَنْتَ صَائِمٌ اليَوْمَ؟</a:t>
@@ -11271,6 +11365,7 @@
                   <a:srgbClr val="1B3B6F"/>
                 </a:solidFill>
                 <a:latin typeface="Amiri" pitchFamily="2" charset="-78"/>
+                <a:ea typeface="Amiri" pitchFamily="2" charset="-78"/>
                 <a:cs typeface="Amiri" pitchFamily="2" charset="-78"/>
               </a:rPr>
               <a:t>نَأْكُلُ الإِفْطَارَ مَعَ الأُسْرَةِ. هَلْ تُرِيدُ أَنْ تَأْتِيَ يَوْمَ السَّبْتِ؟</a:t>
@@ -11347,6 +11442,7 @@
                   <a:srgbClr val="1B3B6F"/>
                 </a:solidFill>
                 <a:latin typeface="Amiri" pitchFamily="2" charset="-78"/>
+                <a:ea typeface="Amiri" pitchFamily="2" charset="-78"/>
                 <a:cs typeface="Amiri" pitchFamily="2" charset="-78"/>
               </a:rPr>
               <a:t>وَمَتَى تَأْكُلُ؟</a:t>
@@ -11450,6 +11546,7 @@
                   <a:srgbClr val="1B3B6F"/>
                 </a:solidFill>
                 <a:latin typeface="Amiri" pitchFamily="2" charset="-78"/>
+                <a:ea typeface="Amiri" pitchFamily="2" charset="-78"/>
                 <a:cs typeface="Amiri" pitchFamily="2" charset="-78"/>
               </a:rPr>
               <a:t>فِي بَيْتِنَا، فِي السَّاعَةِ الثَّامِنَةِ وَالرُّبْعِ، لِأَنَّ المَغْرِبَ مُتَأَخِّرٌ فِي الصَّيْفِ.</a:t>
@@ -11526,6 +11623,7 @@
                   <a:srgbClr val="1B3B6F"/>
                 </a:solidFill>
                 <a:latin typeface="Amiri" pitchFamily="2" charset="-78"/>
+                <a:ea typeface="Amiri" pitchFamily="2" charset="-78"/>
                 <a:cs typeface="Amiri" pitchFamily="2" charset="-78"/>
               </a:rPr>
               <a:t>بِكُلِّ سُرُورٍ! مَتَى وَأَيْنَ؟</a:t>
@@ -11629,6 +11727,7 @@
                   <a:srgbClr val="1B3B6F"/>
                 </a:solidFill>
                 <a:latin typeface="Amiri" pitchFamily="2" charset="-78"/>
+                <a:ea typeface="Amiri" pitchFamily="2" charset="-78"/>
                 <a:cs typeface="Amiri" pitchFamily="2" charset="-78"/>
               </a:rPr>
               <a:t>لَا شَيْءَ، أَنْتَ ضَيْفُنَا! وَأَنْتَ، كَيْفَ تَحْتَفِلُونَ بِعِيدِ المِيلَادِ؟</a:t>
@@ -11705,6 +11804,7 @@
                   <a:srgbClr val="1B3B6F"/>
                 </a:solidFill>
                 <a:latin typeface="Amiri" pitchFamily="2" charset="-78"/>
+                <a:ea typeface="Amiri" pitchFamily="2" charset="-78"/>
                 <a:cs typeface="Amiri" pitchFamily="2" charset="-78"/>
               </a:rPr>
               <a:t>مَاذَا أُحْضِرُ مَعِي؟</a:t>
@@ -11808,6 +11908,7 @@
                   <a:srgbClr val="1B3B6F"/>
                 </a:solidFill>
                 <a:latin typeface="Amiri" pitchFamily="2" charset="-78"/>
+                <a:ea typeface="Amiri" pitchFamily="2" charset="-78"/>
                 <a:cs typeface="Amiri" pitchFamily="2" charset="-78"/>
               </a:rPr>
               <a:t>صَعْبٌ قَلِيلًا فِي الأَيَّامِ الأُولَى، لٰكِنَّهُ يُعَلِّمُنِي الصَّبْرَ، وَيُذَكِّرُنِي بِالفُقَرَاءِ.</a:t>
@@ -11884,6 +11985,7 @@
                   <a:srgbClr val="1B3B6F"/>
                 </a:solidFill>
                 <a:latin typeface="Amiri" pitchFamily="2" charset="-78"/>
+                <a:ea typeface="Amiri" pitchFamily="2" charset="-78"/>
                 <a:cs typeface="Amiri" pitchFamily="2" charset="-78"/>
               </a:rPr>
               <a:t>نَتَبَادَلُ الهَدَايَا. أَلَيْسَ الصِّيَامُ صَعْبًا؟</a:t>
@@ -12093,6 +12195,7 @@
                   <a:srgbClr val="D4AF37"/>
                 </a:solidFill>
                 <a:latin typeface="Amiri" pitchFamily="2" charset="-78"/>
+                <a:ea typeface="Amiri" pitchFamily="2" charset="-78"/>
                 <a:cs typeface="Amiri" pitchFamily="2" charset="-78"/>
               </a:rPr>
               <a:t>م</a:t>
@@ -12413,6 +12516,7 @@
                   <a:srgbClr val="8A6D1E"/>
                 </a:solidFill>
                 <a:latin typeface="Amiri" pitchFamily="2" charset="-78"/>
+                <a:ea typeface="Amiri" pitchFamily="2" charset="-78"/>
                 <a:cs typeface="Amiri" pitchFamily="2" charset="-78"/>
               </a:rPr>
               <a:t>نَمُوذَجُ الإِجَابَةِ</a:t>
@@ -12655,6 +12759,7 @@
                   <a:srgbClr val="1B3B6F"/>
                 </a:solidFill>
                 <a:latin typeface="Amiri" pitchFamily="2" charset="-78"/>
+                <a:ea typeface="Amiri" pitchFamily="2" charset="-78"/>
                 <a:cs typeface="Amiri" pitchFamily="2" charset="-78"/>
               </a:rPr>
               <a:t>اشْتَرَيْنَا مَلَابِسَ جَدِيدَةً وَلَبِسْنَاهَا صَبَاحَ العِيدِ، وَقَبْلَ ذٰلِكَ بِيَوْمٍ خَبَزْنَا الكَعْكَ وَوَزَّعْنَاهُ عَلَى الجِيرَانِ.</a:t>
@@ -12731,6 +12836,7 @@
                   <a:srgbClr val="1B3B6F"/>
                 </a:solidFill>
                 <a:latin typeface="Amiri" pitchFamily="2" charset="-78"/>
+                <a:ea typeface="Amiri" pitchFamily="2" charset="-78"/>
                 <a:cs typeface="Amiri" pitchFamily="2" charset="-78"/>
               </a:rPr>
               <a:t>كَيْفَ اسْتَعْدَدْتُمْ لِلْعِيدِ الأَخِيرِ؟</a:t>
@@ -12834,6 +12940,7 @@
                   <a:srgbClr val="1B3B6F"/>
                 </a:solidFill>
                 <a:latin typeface="Amiri" pitchFamily="2" charset="-78"/>
+                <a:ea typeface="Amiri" pitchFamily="2" charset="-78"/>
                 <a:cs typeface="Amiri" pitchFamily="2" charset="-78"/>
               </a:rPr>
               <a:t>أَوَّلًا صَلَّيْنَا فِي الحَدِيقَةِ مَعَ آلَافِ النَّاسِ، ثُمَّ فَطَرْنَا عِنْدَ جَدِّي، بَعْدَ ذٰلِكَ زُرْنَا أَعْمَامِي، وَأَخِيرًا ذَهَبْنَا إِلَى المَلَاهِي.</a:t>
@@ -12910,6 +13017,7 @@
                   <a:srgbClr val="1B3B6F"/>
                 </a:solidFill>
                 <a:latin typeface="Amiri" pitchFamily="2" charset="-78"/>
+                <a:ea typeface="Amiri" pitchFamily="2" charset="-78"/>
                 <a:cs typeface="Amiri" pitchFamily="2" charset="-78"/>
               </a:rPr>
               <a:t>وَيَوْمُ العِيدِ نَفْسُهُ؟</a:t>
@@ -13013,6 +13121,7 @@
                   <a:srgbClr val="1B3B6F"/>
                 </a:solidFill>
                 <a:latin typeface="Amiri" pitchFamily="2" charset="-78"/>
+                <a:ea typeface="Amiri" pitchFamily="2" charset="-78"/>
                 <a:cs typeface="Amiri" pitchFamily="2" charset="-78"/>
               </a:rPr>
               <a:t>عِنْدَمَا كُنْتُ صَغِيرًا كُنَّا نَحْتَفِلُ فِي الأُرْدُنِّ مَعَ كُلِّ العَائِلَةِ، أَمَّا الآنَ فَنَحْتَفِلُ هُنَا، وَنُكَلِّمُ أَقَارِبَنَا بِالفِيدْيُو.</a:t>
@@ -13089,6 +13198,7 @@
                   <a:srgbClr val="1B3B6F"/>
                 </a:solidFill>
                 <a:latin typeface="Amiri" pitchFamily="2" charset="-78"/>
+                <a:ea typeface="Amiri" pitchFamily="2" charset="-78"/>
                 <a:cs typeface="Amiri" pitchFamily="2" charset="-78"/>
               </a:rPr>
               <a:t>هَلْ يَخْتَلِفُ العِيدُ الآنَ عَنِ العِيدِ فِي طُفُولَتِكَ؟</a:t>
@@ -13192,6 +13302,7 @@
                   <a:srgbClr val="1B3B6F"/>
                 </a:solidFill>
                 <a:latin typeface="Amiri" pitchFamily="2" charset="-78"/>
+                <a:ea typeface="Amiri" pitchFamily="2" charset="-78"/>
                 <a:cs typeface="Amiri" pitchFamily="2" charset="-78"/>
               </a:rPr>
               <a:t>أَجْمَلُ هَدِيَّةٍ مُصْحَفٌ صَغِيرٌ أَهْدَتْنِي إِيَّاهُ جَدَّتِي، وَأَحْمِلُهُ مَعِي دَائِمًا.</a:t>
@@ -13268,6 +13379,7 @@
                   <a:srgbClr val="1B3B6F"/>
                 </a:solidFill>
                 <a:latin typeface="Amiri" pitchFamily="2" charset="-78"/>
+                <a:ea typeface="Amiri" pitchFamily="2" charset="-78"/>
                 <a:cs typeface="Amiri" pitchFamily="2" charset="-78"/>
               </a:rPr>
               <a:t>مَا أَجْمَلُ هَدِيَّةٍ أَخَذْتَهَا؟</a:t>
@@ -13371,6 +13483,7 @@
                   <a:srgbClr val="1B3B6F"/>
                 </a:solidFill>
                 <a:latin typeface="Amiri" pitchFamily="2" charset="-78"/>
+                <a:ea typeface="Amiri" pitchFamily="2" charset="-78"/>
                 <a:cs typeface="Amiri" pitchFamily="2" charset="-78"/>
               </a:rPr>
               <a:t>سَأُنَظِّمُ مَعَ أَصْدِقَائِي حَفْلَةً صَغِيرَةً لِأَطْفَالِ المُسْتَشْفَى، لِكَيْ يَشْعُرُوا بِفَرْحَةِ العِيدِ أَيْضًا.</a:t>
@@ -13447,6 +13560,7 @@
                   <a:srgbClr val="1B3B6F"/>
                 </a:solidFill>
                 <a:latin typeface="Amiri" pitchFamily="2" charset="-78"/>
+                <a:ea typeface="Amiri" pitchFamily="2" charset="-78"/>
                 <a:cs typeface="Amiri" pitchFamily="2" charset="-78"/>
               </a:rPr>
               <a:t>كَيْفَ سَتَحْتَفِلُ بِالعِيدِ القَادِمِ؟</a:t>
@@ -13656,6 +13770,7 @@
                   <a:srgbClr val="D4AF37"/>
                 </a:solidFill>
                 <a:latin typeface="Amiri" pitchFamily="2" charset="-78"/>
+                <a:ea typeface="Amiri" pitchFamily="2" charset="-78"/>
                 <a:cs typeface="Amiri" pitchFamily="2" charset="-78"/>
               </a:rPr>
               <a:t>م</a:t>
@@ -13976,6 +14091,7 @@
                   <a:srgbClr val="8A6D1E"/>
                 </a:solidFill>
                 <a:latin typeface="Amiri" pitchFamily="2" charset="-78"/>
+                <a:ea typeface="Amiri" pitchFamily="2" charset="-78"/>
                 <a:cs typeface="Amiri" pitchFamily="2" charset="-78"/>
               </a:rPr>
               <a:t>نَمُوذَجُ الإِجَابَةِ</a:t>
@@ -14218,6 +14334,7 @@
                   <a:srgbClr val="1B3B6F"/>
                 </a:solidFill>
                 <a:latin typeface="Amiri" pitchFamily="2" charset="-78"/>
+                <a:ea typeface="Amiri" pitchFamily="2" charset="-78"/>
                 <a:cs typeface="Amiri" pitchFamily="2" charset="-78"/>
               </a:rPr>
               <a:t>لَيْسَ الطَّعَامَ وَلَا الهَدَايَا، بَلِ الشُّعُورُ بِأَنَّنَا أُمَّةٌ وَاحِدَةٌ؛ فَبَعْدَ شَهْرٍ مِنَ الصِّيَامِ نَفْرَحُ مَعًا، وَنَتَذَكَّرُ الفُقَرَاءَ بِزَكَاةِ الفِطْرِ.</a:t>
@@ -14294,6 +14411,7 @@
                   <a:srgbClr val="1B3B6F"/>
                 </a:solidFill>
                 <a:latin typeface="Amiri" pitchFamily="2" charset="-78"/>
+                <a:ea typeface="Amiri" pitchFamily="2" charset="-78"/>
                 <a:cs typeface="Amiri" pitchFamily="2" charset="-78"/>
               </a:rPr>
               <a:t>مَا الَّذِي يَجْعَلُ العِيدَ مُمَيَّزًا بِالنِّسْبَةِ إِلَيْكَ؟</a:t>
@@ -14397,6 +14515,7 @@
                   <a:srgbClr val="1B3B6F"/>
                 </a:solidFill>
                 <a:latin typeface="Amiri" pitchFamily="2" charset="-78"/>
+                <a:ea typeface="Amiri" pitchFamily="2" charset="-78"/>
                 <a:cs typeface="Amiri" pitchFamily="2" charset="-78"/>
               </a:rPr>
               <a:t>نَعَمْ، أُهَنِّئُ أَصْدِقَائِي بِأَعْيَادِهِمْ؛ مَثَلًا، فِي دِيوَالِي زُرْتُ صَدِيقَتِي الهِنْدُوسِيَّةَ مَعَ أُمِّي، وَأَهْدَيْنَاهَا حَلَوِيَّاتٍ، فَأَضَاءَتْ لَنَا مِصْبَاحًا.</a:t>
@@ -14473,6 +14592,7 @@
                   <a:srgbClr val="1B3B6F"/>
                 </a:solidFill>
                 <a:latin typeface="Amiri" pitchFamily="2" charset="-78"/>
+                <a:ea typeface="Amiri" pitchFamily="2" charset="-78"/>
                 <a:cs typeface="Amiri" pitchFamily="2" charset="-78"/>
               </a:rPr>
               <a:t>هَلْ تُشَارِكُ فِي أَعْيَادِ غَيْرِكَ؟</a:t>
@@ -14576,6 +14696,7 @@
                   <a:srgbClr val="1B3B6F"/>
                 </a:solidFill>
                 <a:latin typeface="Amiri" pitchFamily="2" charset="-78"/>
+                <a:ea typeface="Amiri" pitchFamily="2" charset="-78"/>
                 <a:cs typeface="Amiri" pitchFamily="2" charset="-78"/>
               </a:rPr>
               <a:t>صَحِيحٌ أَنَّ المَحَلَّاتِ تَسْتَغِلُّهَا لِتَبِيعَ أَكْثَرَ، غَيْرَ أَنَّ العَائِلَاتِ مَا زَالَتْ تَجْتَمِعُ، مِمَّا يَعْنِي أَنَّ الرُّوحَ بَاقِيَةٌ.</a:t>
@@ -14652,6 +14773,7 @@
                   <a:srgbClr val="1B3B6F"/>
                 </a:solidFill>
                 <a:latin typeface="Amiri" pitchFamily="2" charset="-78"/>
+                <a:ea typeface="Amiri" pitchFamily="2" charset="-78"/>
                 <a:cs typeface="Amiri" pitchFamily="2" charset="-78"/>
               </a:rPr>
               <a:t>يَقُولُ البَعْضُ إِنَّ الأَعْيَادَ صَارَتْ تِجَارِيَّةً.</a:t>
@@ -14755,6 +14877,7 @@
                   <a:srgbClr val="1B3B6F"/>
                 </a:solidFill>
                 <a:latin typeface="Amiri" pitchFamily="2" charset="-78"/>
+                <a:ea typeface="Amiri" pitchFamily="2" charset="-78"/>
                 <a:cs typeface="Amiri" pitchFamily="2" charset="-78"/>
               </a:rPr>
               <a:t>كَانُوا يَسْهَرُونَ لَيْلَةَ العِيدِ يَخْبِزُونَ الكَعْكَ فِي فُرْنِ القَرْيَةِ، وَكَانَ الأَطْفَالُ يَطْرُقُونَ الأَبْوَابَ؛ أَمَّا نَحْنُ فَنَشْتَرِيهِ جَاهِزًا غَالِبًا.</a:t>
@@ -14831,6 +14954,7 @@
                   <a:srgbClr val="1B3B6F"/>
                 </a:solidFill>
                 <a:latin typeface="Amiri" pitchFamily="2" charset="-78"/>
+                <a:ea typeface="Amiri" pitchFamily="2" charset="-78"/>
                 <a:cs typeface="Amiri" pitchFamily="2" charset="-78"/>
               </a:rPr>
               <a:t>كَيْفَ كَانَ أَجْدَادُكَ يَحْتَفِلُونَ؟</a:t>
@@ -14934,6 +15058,7 @@
                   <a:srgbClr val="1B3B6F"/>
                 </a:solidFill>
                 <a:latin typeface="Amiri" pitchFamily="2" charset="-78"/>
+                <a:ea typeface="Amiri" pitchFamily="2" charset="-78"/>
                 <a:cs typeface="Amiri" pitchFamily="2" charset="-78"/>
               </a:rPr>
               <a:t>لَوْ أَضَفْتُ عَادَةً، لَدَعَوْنَا جَارًا وَحِيدًا إِلَى غَدَاءِ العِيدِ كُلَّ سَنَةٍ، لِكَيْ لَا يَبْقَى أَحَدٌ فِي حَيِّنَا وَحْدَهُ فِي يَوْمِ الفَرَحِ.</a:t>
@@ -15010,6 +15135,7 @@
                   <a:srgbClr val="1B3B6F"/>
                 </a:solidFill>
                 <a:latin typeface="Amiri" pitchFamily="2" charset="-78"/>
+                <a:ea typeface="Amiri" pitchFamily="2" charset="-78"/>
                 <a:cs typeface="Amiri" pitchFamily="2" charset="-78"/>
               </a:rPr>
               <a:t>لَوْ أَضَفْتَ عَادَةً جَدِيدَةً إِلَى العِيدِ، فَمَا هِيَ؟</a:t>
@@ -15219,6 +15345,7 @@
                   <a:srgbClr val="D4AF37"/>
                 </a:solidFill>
                 <a:latin typeface="Amiri" pitchFamily="2" charset="-78"/>
+                <a:ea typeface="Amiri" pitchFamily="2" charset="-78"/>
                 <a:cs typeface="Amiri" pitchFamily="2" charset="-78"/>
               </a:rPr>
               <a:t>م</a:t>
@@ -15539,6 +15666,7 @@
                   <a:srgbClr val="8A6D1E"/>
                 </a:solidFill>
                 <a:latin typeface="Amiri" pitchFamily="2" charset="-78"/>
+                <a:ea typeface="Amiri" pitchFamily="2" charset="-78"/>
                 <a:cs typeface="Amiri" pitchFamily="2" charset="-78"/>
               </a:rPr>
               <a:t>أَعْيَادُنَا</a:t>
@@ -15819,6 +15947,7 @@
                   <a:srgbClr val="1B3B6F"/>
                 </a:solidFill>
                 <a:latin typeface="Amiri" pitchFamily="2" charset="-78"/>
+                <a:ea typeface="Amiri" pitchFamily="2" charset="-78"/>
                 <a:cs typeface="Amiri" pitchFamily="2" charset="-78"/>
               </a:rPr>
               <a:t>عِيدِي المُفَضَّلُ … لِأَنَّ …</a:t>
@@ -15895,6 +16024,7 @@
                   <a:srgbClr val="1B3B6F"/>
                 </a:solidFill>
                 <a:latin typeface="Amiri" pitchFamily="2" charset="-78"/>
+                <a:ea typeface="Amiri" pitchFamily="2" charset="-78"/>
                 <a:cs typeface="Amiri" pitchFamily="2" charset="-78"/>
               </a:rPr>
               <a:t>مَا عِيدُكَ المُفَضَّلُ؟</a:t>
@@ -16063,6 +16193,7 @@
                   <a:srgbClr val="1B3B6F"/>
                 </a:solidFill>
                 <a:latin typeface="Amiri" pitchFamily="2" charset="-78"/>
+                <a:ea typeface="Amiri" pitchFamily="2" charset="-78"/>
                 <a:cs typeface="Amiri" pitchFamily="2" charset="-78"/>
               </a:rPr>
               <a:t>أَلْبَسُ …</a:t>
@@ -16139,6 +16270,7 @@
                   <a:srgbClr val="1B3B6F"/>
                 </a:solidFill>
                 <a:latin typeface="Amiri" pitchFamily="2" charset="-78"/>
+                <a:ea typeface="Amiri" pitchFamily="2" charset="-78"/>
                 <a:cs typeface="Amiri" pitchFamily="2" charset="-78"/>
               </a:rPr>
               <a:t>مَاذَا تَلْبَسُ فِي العِيدِ؟</a:t>
@@ -16307,6 +16439,7 @@
                   <a:srgbClr val="1B3B6F"/>
                 </a:solidFill>
                 <a:latin typeface="Amiri" pitchFamily="2" charset="-78"/>
+                <a:ea typeface="Amiri" pitchFamily="2" charset="-78"/>
                 <a:cs typeface="Amiri" pitchFamily="2" charset="-78"/>
               </a:rPr>
               <a:t>أَزُورُ …</a:t>
@@ -16383,6 +16516,7 @@
                   <a:srgbClr val="1B3B6F"/>
                 </a:solidFill>
                 <a:latin typeface="Amiri" pitchFamily="2" charset="-78"/>
+                <a:ea typeface="Amiri" pitchFamily="2" charset="-78"/>
                 <a:cs typeface="Amiri" pitchFamily="2" charset="-78"/>
               </a:rPr>
               <a:t>مَنْ تَزُورُ فِي العِيدِ؟</a:t>
@@ -16551,6 +16685,7 @@
                   <a:srgbClr val="1B3B6F"/>
                 </a:solidFill>
                 <a:latin typeface="Amiri" pitchFamily="2" charset="-78"/>
+                <a:ea typeface="Amiri" pitchFamily="2" charset="-78"/>
                 <a:cs typeface="Amiri" pitchFamily="2" charset="-78"/>
               </a:rPr>
               <a:t>نَعَمْ، أَصُومُ … / …</a:t>
@@ -16627,6 +16762,7 @@
                   <a:srgbClr val="1B3B6F"/>
                 </a:solidFill>
                 <a:latin typeface="Amiri" pitchFamily="2" charset="-78"/>
+                <a:ea typeface="Amiri" pitchFamily="2" charset="-78"/>
                 <a:cs typeface="Amiri" pitchFamily="2" charset="-78"/>
               </a:rPr>
               <a:t>هَلْ تَصُومُ فِي رَمَضَانَ؟</a:t>
@@ -16795,6 +16931,7 @@
                   <a:srgbClr val="1B3B6F"/>
                 </a:solidFill>
                 <a:latin typeface="Amiri" pitchFamily="2" charset="-78"/>
+                <a:ea typeface="Amiri" pitchFamily="2" charset="-78"/>
                 <a:cs typeface="Amiri" pitchFamily="2" charset="-78"/>
               </a:rPr>
               <a:t>نَأْكُلُ …</a:t>
@@ -16871,6 +17008,7 @@
                   <a:srgbClr val="1B3B6F"/>
                 </a:solidFill>
                 <a:latin typeface="Amiri" pitchFamily="2" charset="-78"/>
+                <a:ea typeface="Amiri" pitchFamily="2" charset="-78"/>
                 <a:cs typeface="Amiri" pitchFamily="2" charset="-78"/>
               </a:rPr>
               <a:t>مَا أَكْلَةُ العِيدِ فِي بَيْتِكُمْ؟</a:t>
@@ -17025,6 +17163,7 @@
                   <a:srgbClr val="1B3B6F"/>
                 </a:solidFill>
                 <a:latin typeface="Amiri" pitchFamily="2" charset="-78"/>
+                <a:ea typeface="Amiri" pitchFamily="2" charset="-78"/>
                 <a:cs typeface="Amiri" pitchFamily="2" charset="-78"/>
               </a:rPr>
               <a:t>عَفْوًا، هَلْ يُمْكِنُ أَنْ تُعِيدَ السُّؤَالَ؟</a:t>
@@ -17158,6 +17297,7 @@
                   <a:srgbClr val="D4AF37"/>
                 </a:solidFill>
                 <a:latin typeface="Amiri" pitchFamily="2" charset="-78"/>
+                <a:ea typeface="Amiri" pitchFamily="2" charset="-78"/>
                 <a:cs typeface="Amiri" pitchFamily="2" charset="-78"/>
               </a:rPr>
               <a:t>م</a:t>
@@ -17478,6 +17618,7 @@
                   <a:srgbClr val="8A6D1E"/>
                 </a:solidFill>
                 <a:latin typeface="Amiri" pitchFamily="2" charset="-78"/>
+                <a:ea typeface="Amiri" pitchFamily="2" charset="-78"/>
                 <a:cs typeface="Amiri" pitchFamily="2" charset="-78"/>
               </a:rPr>
               <a:t>العِيدُ بَيْنَ الأَمْسِ وَاليَوْمِ</a:t>
@@ -17758,6 +17899,7 @@
                   <a:srgbClr val="1B3B6F"/>
                 </a:solidFill>
                 <a:latin typeface="Amiri" pitchFamily="2" charset="-78"/>
+                <a:ea typeface="Amiri" pitchFamily="2" charset="-78"/>
                 <a:cs typeface="Amiri" pitchFamily="2" charset="-78"/>
               </a:rPr>
               <a:t>أَوَّلًا … ثُمَّ … وَأَخِيرًا …</a:t>
@@ -17834,6 +17976,7 @@
                   <a:srgbClr val="1B3B6F"/>
                 </a:solidFill>
                 <a:latin typeface="Amiri" pitchFamily="2" charset="-78"/>
+                <a:ea typeface="Amiri" pitchFamily="2" charset="-78"/>
                 <a:cs typeface="Amiri" pitchFamily="2" charset="-78"/>
               </a:rPr>
               <a:t>صِفْ يَوْمَ العِيدِ فِي بَيْتِكُمْ.</a:t>
@@ -17937,6 +18080,7 @@
                   <a:srgbClr val="1B3B6F"/>
                 </a:solidFill>
                 <a:latin typeface="Amiri" pitchFamily="2" charset="-78"/>
+                <a:ea typeface="Amiri" pitchFamily="2" charset="-78"/>
                 <a:cs typeface="Amiri" pitchFamily="2" charset="-78"/>
               </a:rPr>
               <a:t>صُمْتُ … وَكُنْتُ … كُلَّ لَيْلَةٍ</a:t>
@@ -18013,6 +18157,7 @@
                   <a:srgbClr val="1B3B6F"/>
                 </a:solidFill>
                 <a:latin typeface="Amiri" pitchFamily="2" charset="-78"/>
+                <a:ea typeface="Amiri" pitchFamily="2" charset="-78"/>
                 <a:cs typeface="Amiri" pitchFamily="2" charset="-78"/>
               </a:rPr>
               <a:t>كَيْفَ قَضَيْتَ رَمَضَانَ الأَخِيرَ؟</a:t>
@@ -18116,6 +18261,7 @@
                   <a:srgbClr val="1B3B6F"/>
                 </a:solidFill>
                 <a:latin typeface="Amiri" pitchFamily="2" charset="-78"/>
+                <a:ea typeface="Amiri" pitchFamily="2" charset="-78"/>
                 <a:cs typeface="Amiri" pitchFamily="2" charset="-78"/>
               </a:rPr>
               <a:t>حَضَرْتُ … ؛ كَانَ … وَ…</a:t>
@@ -18192,6 +18338,7 @@
                   <a:srgbClr val="1B3B6F"/>
                 </a:solidFill>
                 <a:latin typeface="Amiri" pitchFamily="2" charset="-78"/>
+                <a:ea typeface="Amiri" pitchFamily="2" charset="-78"/>
                 <a:cs typeface="Amiri" pitchFamily="2" charset="-78"/>
               </a:rPr>
               <a:t>حَدِّثْنِي عَنْ مُنَاسَبَةٍ خَاصَّةٍ حَضَرْتَهَا.</a:t>
@@ -18295,6 +18442,7 @@
                   <a:srgbClr val="1B3B6F"/>
                 </a:solidFill>
                 <a:latin typeface="Amiri" pitchFamily="2" charset="-78"/>
+                <a:ea typeface="Amiri" pitchFamily="2" charset="-78"/>
                 <a:cs typeface="Amiri" pitchFamily="2" charset="-78"/>
               </a:rPr>
               <a:t>كُنَّا … أَمَّا الآنَ فَنَذْهَبُ …</a:t>
@@ -18371,6 +18519,7 @@
                   <a:srgbClr val="1B3B6F"/>
                 </a:solidFill>
                 <a:latin typeface="Amiri" pitchFamily="2" charset="-78"/>
+                <a:ea typeface="Amiri" pitchFamily="2" charset="-78"/>
                 <a:cs typeface="Amiri" pitchFamily="2" charset="-78"/>
               </a:rPr>
               <a:t>هَلْ تَغَيَّرَ احْتِفَالُكُمْ بِالعِيدِ؟</a:t>
@@ -18474,6 +18623,7 @@
                   <a:srgbClr val="1B3B6F"/>
                 </a:solidFill>
                 <a:latin typeface="Amiri" pitchFamily="2" charset="-78"/>
+                <a:ea typeface="Amiri" pitchFamily="2" charset="-78"/>
                 <a:cs typeface="Amiri" pitchFamily="2" charset="-78"/>
               </a:rPr>
               <a:t>سَأُهْدِيهَا … لِأَنَّ …</a:t>
@@ -18550,6 +18700,7 @@
                   <a:srgbClr val="1B3B6F"/>
                 </a:solidFill>
                 <a:latin typeface="Amiri" pitchFamily="2" charset="-78"/>
+                <a:ea typeface="Amiri" pitchFamily="2" charset="-78"/>
                 <a:cs typeface="Amiri" pitchFamily="2" charset="-78"/>
               </a:rPr>
               <a:t>مَا الهَدِيَّةُ الَّتِي سَتُعْطِيهَا لِأُمِّكَ فِي العِيدِ القَادِمِ؟</a:t>
@@ -18759,6 +18910,7 @@
                   <a:srgbClr val="D4AF37"/>
                 </a:solidFill>
                 <a:latin typeface="Amiri" pitchFamily="2" charset="-78"/>
+                <a:ea typeface="Amiri" pitchFamily="2" charset="-78"/>
                 <a:cs typeface="Amiri" pitchFamily="2" charset="-78"/>
               </a:rPr>
               <a:t>م</a:t>
@@ -19079,6 +19231,7 @@
                   <a:srgbClr val="8A6D1E"/>
                 </a:solidFill>
                 <a:latin typeface="Amiri" pitchFamily="2" charset="-78"/>
+                <a:ea typeface="Amiri" pitchFamily="2" charset="-78"/>
                 <a:cs typeface="Amiri" pitchFamily="2" charset="-78"/>
               </a:rPr>
               <a:t>مَعْنَى الأَعْيَادِ</a:t>
@@ -19359,6 +19512,7 @@
                   <a:srgbClr val="1B3B6F"/>
                 </a:solidFill>
                 <a:latin typeface="Amiri" pitchFamily="2" charset="-78"/>
+                <a:ea typeface="Amiri" pitchFamily="2" charset="-78"/>
                 <a:cs typeface="Amiri" pitchFamily="2" charset="-78"/>
               </a:rPr>
               <a:t>صَحِيحٌ أَنَّ … غَيْرَ أَنَّ …</a:t>
@@ -19435,6 +19589,7 @@
                   <a:srgbClr val="1B3B6F"/>
                 </a:solidFill>
                 <a:latin typeface="Amiri" pitchFamily="2" charset="-78"/>
+                <a:ea typeface="Amiri" pitchFamily="2" charset="-78"/>
                 <a:cs typeface="Amiri" pitchFamily="2" charset="-78"/>
               </a:rPr>
               <a:t>هَلْ فَقَدَتِ الأَعْيَادُ مَعْنَاهَا الحَقِيقِيَّ؟</a:t>
@@ -19538,6 +19693,7 @@
                   <a:srgbClr val="1B3B6F"/>
                 </a:solidFill>
                 <a:latin typeface="Amiri" pitchFamily="2" charset="-78"/>
+                <a:ea typeface="Amiri" pitchFamily="2" charset="-78"/>
                 <a:cs typeface="Amiri" pitchFamily="2" charset="-78"/>
               </a:rPr>
               <a:t>أَرَى أَنَّ … لِأَنَّ … مِمَّا …</a:t>
@@ -19614,6 +19770,7 @@
                   <a:srgbClr val="1B3B6F"/>
                 </a:solidFill>
                 <a:latin typeface="Amiri" pitchFamily="2" charset="-78"/>
+                <a:ea typeface="Amiri" pitchFamily="2" charset="-78"/>
                 <a:cs typeface="Amiri" pitchFamily="2" charset="-78"/>
               </a:rPr>
               <a:t>مَا فَائِدَةُ الاحْتِفَالِ بِأَعْيَادِ الآخَرِينَ فِي المَدْرَسَةِ؟</a:t>
@@ -19717,6 +19874,7 @@
                   <a:srgbClr val="1B3B6F"/>
                 </a:solidFill>
                 <a:latin typeface="Amiri" pitchFamily="2" charset="-78"/>
+                <a:ea typeface="Amiri" pitchFamily="2" charset="-78"/>
                 <a:cs typeface="Amiri" pitchFamily="2" charset="-78"/>
               </a:rPr>
               <a:t>هُنَاكَ … بَيْنَمَا هُنَا …</a:t>
@@ -19793,6 +19951,7 @@
                   <a:srgbClr val="1B3B6F"/>
                 </a:solidFill>
                 <a:latin typeface="Amiri" pitchFamily="2" charset="-78"/>
+                <a:ea typeface="Amiri" pitchFamily="2" charset="-78"/>
                 <a:cs typeface="Amiri" pitchFamily="2" charset="-78"/>
               </a:rPr>
               <a:t>كَيْفَ تَخْتَلِفُ الأَعْيَادُ فِي بَلَدٍ مُسْلِمٍ عَنْهَا فِي بَرِيطَانْيَا؟</a:t>
@@ -19896,6 +20055,7 @@
                   <a:srgbClr val="1B3B6F"/>
                 </a:solidFill>
                 <a:latin typeface="Amiri" pitchFamily="2" charset="-78"/>
+                <a:ea typeface="Amiri" pitchFamily="2" charset="-78"/>
                 <a:cs typeface="Amiri" pitchFamily="2" charset="-78"/>
               </a:rPr>
               <a:t>أَهَمُّ ذِكْرَى … عِنْدَمَا …</a:t>
@@ -19972,6 +20132,7 @@
                   <a:srgbClr val="1B3B6F"/>
                 </a:solidFill>
                 <a:latin typeface="Amiri" pitchFamily="2" charset="-78"/>
+                <a:ea typeface="Amiri" pitchFamily="2" charset="-78"/>
                 <a:cs typeface="Amiri" pitchFamily="2" charset="-78"/>
               </a:rPr>
               <a:t>مَا أَهَمُّ ذِكْرَى لَكَ مِنْ عِيدٍ مَضَى؟</a:t>
@@ -20075,6 +20236,7 @@
                   <a:srgbClr val="1B3B6F"/>
                 </a:solidFill>
                 <a:latin typeface="Amiri" pitchFamily="2" charset="-78"/>
+                <a:ea typeface="Amiri" pitchFamily="2" charset="-78"/>
                 <a:cs typeface="Amiri" pitchFamily="2" charset="-78"/>
               </a:rPr>
               <a:t>لَوْ حَدَثَ ذٰلِكَ، لَبَحَثْتُ …</a:t>
@@ -20151,6 +20313,7 @@
                   <a:srgbClr val="1B3B6F"/>
                 </a:solidFill>
                 <a:latin typeface="Amiri" pitchFamily="2" charset="-78"/>
+                <a:ea typeface="Amiri" pitchFamily="2" charset="-78"/>
                 <a:cs typeface="Amiri" pitchFamily="2" charset="-78"/>
               </a:rPr>
               <a:t>لَوْ قَضَيْتَ العِيدَ وَحْدَكَ فِي بَلَدٍ بَعِيدٍ، مَاذَا تَفْعَلُ؟</a:t>
@@ -20360,6 +20523,7 @@
                   <a:srgbClr val="D4AF37"/>
                 </a:solidFill>
                 <a:latin typeface="Amiri" pitchFamily="2" charset="-78"/>
+                <a:ea typeface="Amiri" pitchFamily="2" charset="-78"/>
                 <a:cs typeface="Amiri" pitchFamily="2" charset="-78"/>
               </a:rPr>
               <a:t>م</a:t>
@@ -20680,6 +20844,7 @@
                   <a:srgbClr val="8A6D1E"/>
                 </a:solidFill>
                 <a:latin typeface="Amiri" pitchFamily="2" charset="-78"/>
+                <a:ea typeface="Amiri" pitchFamily="2" charset="-78"/>
                 <a:cs typeface="Amiri" pitchFamily="2" charset="-78"/>
               </a:rPr>
               <a:t>آدَابُ الصَّفِّ</a:t>
@@ -22211,6 +22376,7 @@
                   <a:srgbClr val="D4AF37"/>
                 </a:solidFill>
                 <a:latin typeface="Amiri" pitchFamily="2" charset="-78"/>
+                <a:ea typeface="Amiri" pitchFamily="2" charset="-78"/>
                 <a:cs typeface="Amiri" pitchFamily="2" charset="-78"/>
               </a:rPr>
               <a:t>م</a:t>
@@ -22531,6 +22697,7 @@
                   <a:srgbClr val="8A6D1E"/>
                 </a:solidFill>
                 <a:latin typeface="Amiri" pitchFamily="2" charset="-78"/>
+                <a:ea typeface="Amiri" pitchFamily="2" charset="-78"/>
                 <a:cs typeface="Amiri" pitchFamily="2" charset="-78"/>
               </a:rPr>
               <a:t>نَمُوذَجُ الإِجَابَةِ</a:t>
@@ -22773,6 +22940,7 @@
                   <a:srgbClr val="1B3B6F"/>
                 </a:solidFill>
                 <a:latin typeface="Amiri" pitchFamily="2" charset="-78"/>
+                <a:ea typeface="Amiri" pitchFamily="2" charset="-78"/>
                 <a:cs typeface="Amiri" pitchFamily="2" charset="-78"/>
               </a:rPr>
               <a:t>عِيدِيَ المُفَضَّلُ عِيدُ الفِطْرِ، لِأَنَّهُ بَعْدَ رَمَضَانَ.</a:t>
@@ -22849,6 +23017,7 @@
                   <a:srgbClr val="1B3B6F"/>
                 </a:solidFill>
                 <a:latin typeface="Amiri" pitchFamily="2" charset="-78"/>
+                <a:ea typeface="Amiri" pitchFamily="2" charset="-78"/>
                 <a:cs typeface="Amiri" pitchFamily="2" charset="-78"/>
               </a:rPr>
               <a:t>مَا عِيدُكَ المُفَضَّلُ؟</a:t>
@@ -22952,6 +23121,7 @@
                   <a:srgbClr val="1B3B6F"/>
                 </a:solidFill>
                 <a:latin typeface="Amiri" pitchFamily="2" charset="-78"/>
+                <a:ea typeface="Amiri" pitchFamily="2" charset="-78"/>
                 <a:cs typeface="Amiri" pitchFamily="2" charset="-78"/>
               </a:rPr>
               <a:t>أَلْبَسُ مَلَابِسَ جَدِيدَةً.</a:t>
@@ -23028,6 +23198,7 @@
                   <a:srgbClr val="1B3B6F"/>
                 </a:solidFill>
                 <a:latin typeface="Amiri" pitchFamily="2" charset="-78"/>
+                <a:ea typeface="Amiri" pitchFamily="2" charset="-78"/>
                 <a:cs typeface="Amiri" pitchFamily="2" charset="-78"/>
               </a:rPr>
               <a:t>مَاذَا تَلْبَسُ فِي العِيدِ؟</a:t>
@@ -23131,6 +23302,7 @@
                   <a:srgbClr val="1B3B6F"/>
                 </a:solidFill>
                 <a:latin typeface="Amiri" pitchFamily="2" charset="-78"/>
+                <a:ea typeface="Amiri" pitchFamily="2" charset="-78"/>
                 <a:cs typeface="Amiri" pitchFamily="2" charset="-78"/>
               </a:rPr>
               <a:t>أَزُورُ جَدِّي وَجَدَّتِي وَأَعْمَامِي.</a:t>
@@ -23207,6 +23379,7 @@
                   <a:srgbClr val="1B3B6F"/>
                 </a:solidFill>
                 <a:latin typeface="Amiri" pitchFamily="2" charset="-78"/>
+                <a:ea typeface="Amiri" pitchFamily="2" charset="-78"/>
                 <a:cs typeface="Amiri" pitchFamily="2" charset="-78"/>
               </a:rPr>
               <a:t>مَنْ تَزُورُ فِي العِيدِ؟</a:t>
@@ -23310,6 +23483,7 @@
                   <a:srgbClr val="1B3B6F"/>
                 </a:solidFill>
                 <a:latin typeface="Amiri" pitchFamily="2" charset="-78"/>
+                <a:ea typeface="Amiri" pitchFamily="2" charset="-78"/>
                 <a:cs typeface="Amiri" pitchFamily="2" charset="-78"/>
               </a:rPr>
               <a:t>نَعَمْ، أَصُومُ كُلَّ الشَّهْرِ.</a:t>
@@ -23386,6 +23560,7 @@
                   <a:srgbClr val="1B3B6F"/>
                 </a:solidFill>
                 <a:latin typeface="Amiri" pitchFamily="2" charset="-78"/>
+                <a:ea typeface="Amiri" pitchFamily="2" charset="-78"/>
                 <a:cs typeface="Amiri" pitchFamily="2" charset="-78"/>
               </a:rPr>
               <a:t>هَلْ تَصُومُ فِي رَمَضَانَ؟</a:t>
@@ -23489,6 +23664,7 @@
                   <a:srgbClr val="1B3B6F"/>
                 </a:solidFill>
                 <a:latin typeface="Amiri" pitchFamily="2" charset="-78"/>
+                <a:ea typeface="Amiri" pitchFamily="2" charset="-78"/>
                 <a:cs typeface="Amiri" pitchFamily="2" charset="-78"/>
               </a:rPr>
               <a:t>نَأْكُلُ البِرْيَانِي، وَتَطْبُخُهُ أُمِّي.</a:t>
@@ -23565,6 +23741,7 @@
                   <a:srgbClr val="1B3B6F"/>
                 </a:solidFill>
                 <a:latin typeface="Amiri" pitchFamily="2" charset="-78"/>
+                <a:ea typeface="Amiri" pitchFamily="2" charset="-78"/>
                 <a:cs typeface="Amiri" pitchFamily="2" charset="-78"/>
               </a:rPr>
               <a:t>مَا أَكْلَةُ العِيدِ فِي بَيْتِكُمْ؟</a:t>
@@ -23774,6 +23951,7 @@
                   <a:srgbClr val="D4AF37"/>
                 </a:solidFill>
                 <a:latin typeface="Amiri" pitchFamily="2" charset="-78"/>
+                <a:ea typeface="Amiri" pitchFamily="2" charset="-78"/>
                 <a:cs typeface="Amiri" pitchFamily="2" charset="-78"/>
               </a:rPr>
               <a:t>م</a:t>
@@ -24094,6 +24272,7 @@
                   <a:srgbClr val="8A6D1E"/>
                 </a:solidFill>
                 <a:latin typeface="Amiri" pitchFamily="2" charset="-78"/>
+                <a:ea typeface="Amiri" pitchFamily="2" charset="-78"/>
                 <a:cs typeface="Amiri" pitchFamily="2" charset="-78"/>
               </a:rPr>
               <a:t>نَمُوذَجُ الإِجَابَةِ</a:t>
@@ -24336,6 +24515,7 @@
                   <a:srgbClr val="1B3B6F"/>
                 </a:solidFill>
                 <a:latin typeface="Amiri" pitchFamily="2" charset="-78"/>
+                <a:ea typeface="Amiri" pitchFamily="2" charset="-78"/>
                 <a:cs typeface="Amiri" pitchFamily="2" charset="-78"/>
               </a:rPr>
               <a:t>أَوَّلًا نُصَلِّي صَلَاةَ العِيدِ، ثُمَّ نُفْطِرُ مَعًا، وَأَخِيرًا نَزُورُ أَقَارِبَنَا وَنُهَنِّئُهُمْ.</a:t>
@@ -24412,6 +24592,7 @@
                   <a:srgbClr val="1B3B6F"/>
                 </a:solidFill>
                 <a:latin typeface="Amiri" pitchFamily="2" charset="-78"/>
+                <a:ea typeface="Amiri" pitchFamily="2" charset="-78"/>
                 <a:cs typeface="Amiri" pitchFamily="2" charset="-78"/>
               </a:rPr>
               <a:t>صِفْ يَوْمَ العِيدِ فِي بَيْتِكُمْ.</a:t>
@@ -24515,6 +24696,7 @@
                   <a:srgbClr val="1B3B6F"/>
                 </a:solidFill>
                 <a:latin typeface="Amiri" pitchFamily="2" charset="-78"/>
+                <a:ea typeface="Amiri" pitchFamily="2" charset="-78"/>
                 <a:cs typeface="Amiri" pitchFamily="2" charset="-78"/>
               </a:rPr>
               <a:t>صُمْتُ الشَّهْرَ كُلَّهُ، وَكُنْتُ أَذْهَبُ إِلَى المَسْجِدِ كُلَّ لَيْلَةٍ لِصَلَاةِ التَّرَاوِيحِ مَعَ أَبِي.</a:t>
@@ -24591,6 +24773,7 @@
                   <a:srgbClr val="1B3B6F"/>
                 </a:solidFill>
                 <a:latin typeface="Amiri" pitchFamily="2" charset="-78"/>
+                <a:ea typeface="Amiri" pitchFamily="2" charset="-78"/>
                 <a:cs typeface="Amiri" pitchFamily="2" charset="-78"/>
               </a:rPr>
               <a:t>كَيْفَ قَضَيْتَ رَمَضَانَ الأَخِيرَ؟</a:t>
@@ -24694,6 +24877,7 @@
                   <a:srgbClr val="1B3B6F"/>
                 </a:solidFill>
                 <a:latin typeface="Amiri" pitchFamily="2" charset="-78"/>
+                <a:ea typeface="Amiri" pitchFamily="2" charset="-78"/>
                 <a:cs typeface="Amiri" pitchFamily="2" charset="-78"/>
               </a:rPr>
               <a:t>حَضَرْتُ حَفْلَةَ زِفَافِ خَالَتِي فِي الصَّيْفِ؛ كَانَ المَكَانُ جَمِيلًا، وَرَقَصْنَا الدَّبْكَةَ حَتَّى مُنْتَصَفِ اللَّيْلِ.</a:t>
@@ -24770,6 +24954,7 @@
                   <a:srgbClr val="1B3B6F"/>
                 </a:solidFill>
                 <a:latin typeface="Amiri" pitchFamily="2" charset="-78"/>
+                <a:ea typeface="Amiri" pitchFamily="2" charset="-78"/>
                 <a:cs typeface="Amiri" pitchFamily="2" charset="-78"/>
               </a:rPr>
               <a:t>حَدِّثْنِي عَنْ مُنَاسَبَةٍ خَاصَّةٍ حَضَرْتَهَا.</a:t>
@@ -24873,6 +25058,7 @@
                   <a:srgbClr val="1B3B6F"/>
                 </a:solidFill>
                 <a:latin typeface="Amiri" pitchFamily="2" charset="-78"/>
+                <a:ea typeface="Amiri" pitchFamily="2" charset="-78"/>
                 <a:cs typeface="Amiri" pitchFamily="2" charset="-78"/>
               </a:rPr>
               <a:t>كُنَّا نَحْتَفِلُ فِي البَيْتِ فَقَطْ، أَمَّا الآنَ فَنَذْهَبُ إِلَى مِهْرَجَانِ العِيدِ فِي الحَدِيقَةِ الكَبِيرَةِ.</a:t>
@@ -24949,6 +25135,7 @@
                   <a:srgbClr val="1B3B6F"/>
                 </a:solidFill>
                 <a:latin typeface="Amiri" pitchFamily="2" charset="-78"/>
+                <a:ea typeface="Amiri" pitchFamily="2" charset="-78"/>
                 <a:cs typeface="Amiri" pitchFamily="2" charset="-78"/>
               </a:rPr>
               <a:t>هَلْ تَغَيَّرَ احْتِفَالُكُمْ بِالعِيدِ؟</a:t>
@@ -25052,6 +25239,7 @@
                   <a:srgbClr val="1B3B6F"/>
                 </a:solidFill>
                 <a:latin typeface="Amiri" pitchFamily="2" charset="-78"/>
+                <a:ea typeface="Amiri" pitchFamily="2" charset="-78"/>
                 <a:cs typeface="Amiri" pitchFamily="2" charset="-78"/>
               </a:rPr>
               <a:t>سَأُهْدِيهَا عِطْرًا، لِأَنَّهَا تُحِبُّهُ، وَسَأَشْتَرِيهِ مِنْ مَصْرُوفِي.</a:t>
@@ -25131,6 +25319,7 @@
                   <a:srgbClr val="1B3B6F"/>
                 </a:solidFill>
                 <a:latin typeface="Amiri" pitchFamily="2" charset="-78"/>
+                <a:ea typeface="Amiri" pitchFamily="2" charset="-78"/>
                 <a:cs typeface="Amiri" pitchFamily="2" charset="-78"/>
               </a:rPr>
               <a:t>مَا الهَدِيَّةُ الَّتِي سَتُعْطِيهَا لِأُمِّكَ فِي العِيدِ القَادِمِ؟</a:t>
@@ -25340,6 +25529,7 @@
                   <a:srgbClr val="D4AF37"/>
                 </a:solidFill>
                 <a:latin typeface="Amiri" pitchFamily="2" charset="-78"/>
+                <a:ea typeface="Amiri" pitchFamily="2" charset="-78"/>
                 <a:cs typeface="Amiri" pitchFamily="2" charset="-78"/>
               </a:rPr>
               <a:t>م</a:t>
@@ -25660,6 +25850,7 @@
                   <a:srgbClr val="8A6D1E"/>
                 </a:solidFill>
                 <a:latin typeface="Amiri" pitchFamily="2" charset="-78"/>
+                <a:ea typeface="Amiri" pitchFamily="2" charset="-78"/>
                 <a:cs typeface="Amiri" pitchFamily="2" charset="-78"/>
               </a:rPr>
               <a:t>نَمُوذَجُ الإِجَابَةِ</a:t>
@@ -25902,6 +26093,7 @@
                   <a:srgbClr val="1B3B6F"/>
                 </a:solidFill>
                 <a:latin typeface="Amiri" pitchFamily="2" charset="-78"/>
+                <a:ea typeface="Amiri" pitchFamily="2" charset="-78"/>
                 <a:cs typeface="Amiri" pitchFamily="2" charset="-78"/>
               </a:rPr>
               <a:t>صَحِيحٌ أَنَّ الإِعْلَانَاتِ تُرَكِّزُ عَلَى الشِّرَاءِ، غَيْرَ أَنَّ المَعْنَى يَبْقَى فِي أَيْدِينَا؛ فَنَحْنُ الَّذِينَ نُقَرِّرُ هَلْ نَجْعَلُهُ يَوْمَ تَسَوُّقٍ أَمْ يَوْمَ تَرَاحُمٍ.</a:t>
@@ -25978,6 +26170,7 @@
                   <a:srgbClr val="1B3B6F"/>
                 </a:solidFill>
                 <a:latin typeface="Amiri" pitchFamily="2" charset="-78"/>
+                <a:ea typeface="Amiri" pitchFamily="2" charset="-78"/>
                 <a:cs typeface="Amiri" pitchFamily="2" charset="-78"/>
               </a:rPr>
               <a:t>هَلْ فَقَدَتِ الأَعْيَادُ مَعْنَاهَا الحَقِيقِيَّ؟</a:t>
@@ -26081,6 +26274,7 @@
                   <a:srgbClr val="1B3B6F"/>
                 </a:solidFill>
                 <a:latin typeface="Amiri" pitchFamily="2" charset="-78"/>
+                <a:ea typeface="Amiri" pitchFamily="2" charset="-78"/>
                 <a:cs typeface="Amiri" pitchFamily="2" charset="-78"/>
               </a:rPr>
               <a:t>أَرَى أَنَّهُ مُفِيدٌ جِدًّا، لِأَنَّ الطَّالِبَ يَشْعُرُ بِأَنَّ ثَقَافَتَهُ مُحْتَرَمَةٌ، مِمَّا يُقَوِّي انْتِمَاءَهُ إِلَى المَدْرَسَةِ.</a:t>
@@ -26160,6 +26354,7 @@
                   <a:srgbClr val="1B3B6F"/>
                 </a:solidFill>
                 <a:latin typeface="Amiri" pitchFamily="2" charset="-78"/>
+                <a:ea typeface="Amiri" pitchFamily="2" charset="-78"/>
                 <a:cs typeface="Amiri" pitchFamily="2" charset="-78"/>
               </a:rPr>
               <a:t>مَا فَائِدَةُ الاحْتِفَالِ بِأَعْيَادِ الآخَرِينَ فِي المَدْرَسَةِ؟</a:t>
@@ -26263,6 +26458,7 @@
                   <a:srgbClr val="1B3B6F"/>
                 </a:solidFill>
                 <a:latin typeface="Amiri" pitchFamily="2" charset="-78"/>
+                <a:ea typeface="Amiri" pitchFamily="2" charset="-78"/>
                 <a:cs typeface="Amiri" pitchFamily="2" charset="-78"/>
               </a:rPr>
               <a:t>هُنَاكَ تُعَطَّلُ المَدَارِسُ وَتَمْتَلِئُ الشَّوَارِعُ بِالزِّينَةِ، بَيْنَمَا هُنَا يَذْهَبُ بَعْضُ النَّاسِ إِلَى العَمَلِ، لٰكِنَّ المُجْتَمَعَ يَصْنَعُ أَجْوَاءَهُ الخَاصَّةَ.</a:t>
@@ -26342,6 +26538,7 @@
                   <a:srgbClr val="1B3B6F"/>
                 </a:solidFill>
                 <a:latin typeface="Amiri" pitchFamily="2" charset="-78"/>
+                <a:ea typeface="Amiri" pitchFamily="2" charset="-78"/>
                 <a:cs typeface="Amiri" pitchFamily="2" charset="-78"/>
               </a:rPr>
               <a:t>كَيْفَ تَخْتَلِفُ الأَعْيَادُ فِي بَلَدٍ مُسْلِمٍ عَنْهَا فِي بَرِيطَانْيَا؟</a:t>
@@ -26551,6 +26748,7 @@
                   <a:srgbClr val="D4AF37"/>
                 </a:solidFill>
                 <a:latin typeface="Amiri" pitchFamily="2" charset="-78"/>
+                <a:ea typeface="Amiri" pitchFamily="2" charset="-78"/>
                 <a:cs typeface="Amiri" pitchFamily="2" charset="-78"/>
               </a:rPr>
               <a:t>م</a:t>
@@ -26871,6 +27069,7 @@
                   <a:srgbClr val="8A6D1E"/>
                 </a:solidFill>
                 <a:latin typeface="Amiri" pitchFamily="2" charset="-78"/>
+                <a:ea typeface="Amiri" pitchFamily="2" charset="-78"/>
                 <a:cs typeface="Amiri" pitchFamily="2" charset="-78"/>
               </a:rPr>
               <a:t>نَمُوذَجُ الإِجَابَةِ</a:t>
@@ -27113,6 +27312,7 @@
                   <a:srgbClr val="1B3B6F"/>
                 </a:solidFill>
                 <a:latin typeface="Amiri" pitchFamily="2" charset="-78"/>
+                <a:ea typeface="Amiri" pitchFamily="2" charset="-78"/>
                 <a:cs typeface="Amiri" pitchFamily="2" charset="-78"/>
               </a:rPr>
               <a:t>أَهَمُّ ذِكْرَى عِنْدَمَا صُمْتُ رَمَضَانَ كَامِلًا لِأَوَّلِ مَرَّةٍ وَأَنَا فِي العَاشِرَةِ، فَأَهْدَانِي جَدِّي سَاعَةً مَا زِلْتُ أَلْبَسُهَا.</a:t>
@@ -27189,6 +27389,7 @@
                   <a:srgbClr val="1B3B6F"/>
                 </a:solidFill>
                 <a:latin typeface="Amiri" pitchFamily="2" charset="-78"/>
+                <a:ea typeface="Amiri" pitchFamily="2" charset="-78"/>
                 <a:cs typeface="Amiri" pitchFamily="2" charset="-78"/>
               </a:rPr>
               <a:t>مَا أَهَمُّ ذِكْرَى لَكَ مِنْ عِيدٍ مَضَى؟</a:t>
@@ -27292,6 +27493,7 @@
                   <a:srgbClr val="1B3B6F"/>
                 </a:solidFill>
                 <a:latin typeface="Amiri" pitchFamily="2" charset="-78"/>
+                <a:ea typeface="Amiri" pitchFamily="2" charset="-78"/>
                 <a:cs typeface="Amiri" pitchFamily="2" charset="-78"/>
               </a:rPr>
               <a:t>لَوْ حَدَثَ ذٰلِكَ، لَبَحَثْتُ عَنْ أَقْرَبِ مَسْجِدٍ لِأُصَلِّيَ مَعَ النَّاسِ، وَلَكَلَّمْتُ أُسْرَتِي بِالفِيدْيُو، فَالعِيدُ لَا يَكْتَمِلُ إِلَّا مَعَ الآخَرِينَ.</a:t>
@@ -27371,6 +27573,7 @@
                   <a:srgbClr val="1B3B6F"/>
                 </a:solidFill>
                 <a:latin typeface="Amiri" pitchFamily="2" charset="-78"/>
+                <a:ea typeface="Amiri" pitchFamily="2" charset="-78"/>
                 <a:cs typeface="Amiri" pitchFamily="2" charset="-78"/>
               </a:rPr>
               <a:t>لَوْ قَضَيْتَ العِيدَ وَحْدَكَ فِي بَلَدٍ بَعِيدٍ، مَاذَا تَفْعَلُ؟</a:t>
@@ -27580,6 +27783,7 @@
                   <a:srgbClr val="D4AF37"/>
                 </a:solidFill>
                 <a:latin typeface="Amiri" pitchFamily="2" charset="-78"/>
+                <a:ea typeface="Amiri" pitchFamily="2" charset="-78"/>
                 <a:cs typeface="Amiri" pitchFamily="2" charset="-78"/>
               </a:rPr>
               <a:t>م</a:t>
@@ -27900,6 +28104,7 @@
                   <a:srgbClr val="8A6D1E"/>
                 </a:solidFill>
                 <a:latin typeface="Amiri" pitchFamily="2" charset="-78"/>
+                <a:ea typeface="Amiri" pitchFamily="2" charset="-78"/>
                 <a:cs typeface="Amiri" pitchFamily="2" charset="-78"/>
               </a:rPr>
               <a:t>قَيِّمْ عَمَلَكَ</a:t>
@@ -29144,6 +29349,7 @@
                   <a:srgbClr val="FFFFFF"/>
                 </a:solidFill>
                 <a:latin typeface="Amiri" pitchFamily="2" charset="-78"/>
+                <a:ea typeface="Amiri" pitchFamily="2" charset="-78"/>
                 <a:cs typeface="Amiri" pitchFamily="2" charset="-78"/>
               </a:rPr>
               <a:t>أَحْسَنْتُمْ! إِلَى اللِّقَاءِ</a:t>
@@ -29296,6 +29502,7 @@
                   <a:srgbClr val="D4AF37"/>
                 </a:solidFill>
                 <a:latin typeface="Amiri" pitchFamily="2" charset="-78"/>
+                <a:ea typeface="Amiri" pitchFamily="2" charset="-78"/>
                 <a:cs typeface="Amiri" pitchFamily="2" charset="-78"/>
               </a:rPr>
               <a:t>وَرْشَةُ الكِتَابَةِ</a:t>
@@ -29429,6 +29636,7 @@
                   <a:srgbClr val="D4AF37"/>
                 </a:solidFill>
                 <a:latin typeface="Amiri" pitchFamily="2" charset="-78"/>
+                <a:ea typeface="Amiri" pitchFamily="2" charset="-78"/>
                 <a:cs typeface="Amiri" pitchFamily="2" charset="-78"/>
               </a:rPr>
               <a:t>م</a:t>
@@ -29749,6 +29957,7 @@
                   <a:srgbClr val="8A6D1E"/>
                 </a:solidFill>
                 <a:latin typeface="Amiri" pitchFamily="2" charset="-78"/>
+                <a:ea typeface="Amiri" pitchFamily="2" charset="-78"/>
                 <a:cs typeface="Amiri" pitchFamily="2" charset="-78"/>
               </a:rPr>
               <a:t>خَرِيطَةُ الوَرْشَةِ</a:t>
@@ -30063,6 +30272,7 @@
                   <a:srgbClr val="1B3B6F"/>
                 </a:solidFill>
                 <a:latin typeface="Amiri" pitchFamily="2" charset="-78"/>
+                <a:ea typeface="Amiri" pitchFamily="2" charset="-78"/>
                 <a:cs typeface="Amiri" pitchFamily="2" charset="-78"/>
               </a:rPr>
               <a:t>كَيْفَ</a:t>
@@ -30339,6 +30549,7 @@
                   <a:srgbClr val="1E6B52"/>
                 </a:solidFill>
                 <a:latin typeface="Amiri" pitchFamily="2" charset="-78"/>
+                <a:ea typeface="Amiri" pitchFamily="2" charset="-78"/>
                 <a:cs typeface="Amiri" pitchFamily="2" charset="-78"/>
               </a:rPr>
               <a:t>تَمْثِيلُ الدَّوْرِ</a:t>
@@ -30615,6 +30826,7 @@
                   <a:srgbClr val="8A6D1E"/>
                 </a:solidFill>
                 <a:latin typeface="Amiri" pitchFamily="2" charset="-78"/>
+                <a:ea typeface="Amiri" pitchFamily="2" charset="-78"/>
                 <a:cs typeface="Amiri" pitchFamily="2" charset="-78"/>
               </a:rPr>
               <a:t>النَّمُوذَجُ</a:t>
@@ -30891,6 +31103,7 @@
                   <a:srgbClr val="1E6B52"/>
                 </a:solidFill>
                 <a:latin typeface="Amiri" pitchFamily="2" charset="-78"/>
+                <a:ea typeface="Amiri" pitchFamily="2" charset="-78"/>
                 <a:cs typeface="Amiri" pitchFamily="2" charset="-78"/>
               </a:rPr>
               <a:t>المُحَادَثَةُ</a:t>
@@ -31167,6 +31380,7 @@
                   <a:srgbClr val="8A6D1E"/>
                 </a:solidFill>
                 <a:latin typeface="Amiri" pitchFamily="2" charset="-78"/>
+                <a:ea typeface="Amiri" pitchFamily="2" charset="-78"/>
                 <a:cs typeface="Amiri" pitchFamily="2" charset="-78"/>
               </a:rPr>
               <a:t>قَيِّمْ</a:t>
@@ -31410,6 +31624,7 @@
                   <a:srgbClr val="D4AF37"/>
                 </a:solidFill>
                 <a:latin typeface="Amiri" pitchFamily="2" charset="-78"/>
+                <a:ea typeface="Amiri" pitchFamily="2" charset="-78"/>
                 <a:cs typeface="Amiri" pitchFamily="2" charset="-78"/>
               </a:rPr>
               <a:t>م</a:t>
@@ -31730,6 +31945,7 @@
                   <a:srgbClr val="8A6D1E"/>
                 </a:solidFill>
                 <a:latin typeface="Amiri" pitchFamily="2" charset="-78"/>
+                <a:ea typeface="Amiri" pitchFamily="2" charset="-78"/>
                 <a:cs typeface="Amiri" pitchFamily="2" charset="-78"/>
               </a:rPr>
               <a:t>امْتِحَانُ التَّحَدُّثِ</a:t>
@@ -32354,6 +32570,7 @@
                   <a:srgbClr val="1B3B6F"/>
                 </a:solidFill>
                 <a:latin typeface="Amiri" pitchFamily="2" charset="-78"/>
+                <a:ea typeface="Amiri" pitchFamily="2" charset="-78"/>
                 <a:cs typeface="Amiri" pitchFamily="2" charset="-78"/>
               </a:rPr>
               <a:t>عَفْوًا، هَلْ يُمْكِنُ أَنْ تُعِيدَ السُّؤَالَ؟</a:t>
@@ -32453,6 +32670,7 @@
                   <a:srgbClr val="1B3B6F"/>
                 </a:solidFill>
                 <a:latin typeface="Amiri" pitchFamily="2" charset="-78"/>
+                <a:ea typeface="Amiri" pitchFamily="2" charset="-78"/>
                 <a:cs typeface="Amiri" pitchFamily="2" charset="-78"/>
               </a:rPr>
               <a:t>لَحْظَةً، دَعْنِي أُفَكِّرُ …</a:t>
@@ -32552,6 +32770,7 @@
                   <a:srgbClr val="1B3B6F"/>
                 </a:solidFill>
                 <a:latin typeface="Amiri" pitchFamily="2" charset="-78"/>
+                <a:ea typeface="Amiri" pitchFamily="2" charset="-78"/>
                 <a:cs typeface="Amiri" pitchFamily="2" charset="-78"/>
               </a:rPr>
               <a:t>أَقْصِدُ …</a:t>
@@ -32723,6 +32942,7 @@
                   <a:srgbClr val="D4AF37"/>
                 </a:solidFill>
                 <a:latin typeface="Amiri" pitchFamily="2" charset="-78"/>
+                <a:ea typeface="Amiri" pitchFamily="2" charset="-78"/>
                 <a:cs typeface="Amiri" pitchFamily="2" charset="-78"/>
               </a:rPr>
               <a:t>م</a:t>
@@ -33043,6 +33263,7 @@
                   <a:srgbClr val="8A6D1E"/>
                 </a:solidFill>
                 <a:latin typeface="Amiri" pitchFamily="2" charset="-78"/>
+                <a:ea typeface="Amiri" pitchFamily="2" charset="-78"/>
                 <a:cs typeface="Amiri" pitchFamily="2" charset="-78"/>
               </a:rPr>
               <a:t>تَرْتِيبُ الأَحْدَاثِ</a:t>
@@ -33346,6 +33567,7 @@
                   <a:srgbClr val="1B3B6F"/>
                 </a:solidFill>
                 <a:latin typeface="Amiri" pitchFamily="2" charset="-78"/>
+                <a:ea typeface="Amiri" pitchFamily="2" charset="-78"/>
                 <a:cs typeface="Amiri" pitchFamily="2" charset="-78"/>
               </a:rPr>
               <a:t>عِيدٌ</a:t>
@@ -33503,6 +33725,7 @@
                   <a:srgbClr val="1B3B6F"/>
                 </a:solidFill>
                 <a:latin typeface="Amiri" pitchFamily="2" charset="-78"/>
+                <a:ea typeface="Amiri" pitchFamily="2" charset="-78"/>
                 <a:cs typeface="Amiri" pitchFamily="2" charset="-78"/>
               </a:rPr>
               <a:t>عِيدٌ مُبَارَكٌ</a:t>
@@ -33606,6 +33829,7 @@
                   <a:srgbClr val="1B3B6F"/>
                 </a:solidFill>
                 <a:latin typeface="Amiri" pitchFamily="2" charset="-78"/>
+                <a:ea typeface="Amiri" pitchFamily="2" charset="-78"/>
                 <a:cs typeface="Amiri" pitchFamily="2" charset="-78"/>
               </a:rPr>
               <a:t>أَعْيَادٌ</a:t>
@@ -33871,6 +34095,7 @@
                   <a:srgbClr val="1B3B6F"/>
                 </a:solidFill>
                 <a:latin typeface="Amiri" pitchFamily="2" charset="-78"/>
+                <a:ea typeface="Amiri" pitchFamily="2" charset="-78"/>
                 <a:cs typeface="Amiri" pitchFamily="2" charset="-78"/>
               </a:rPr>
               <a:t>عِيدُ الفِطْرِ · عِيدُ الأَضْحَى</a:t>
@@ -34028,6 +34253,7 @@
                   <a:srgbClr val="1B3B6F"/>
                 </a:solidFill>
                 <a:latin typeface="Amiri" pitchFamily="2" charset="-78"/>
+                <a:ea typeface="Amiri" pitchFamily="2" charset="-78"/>
                 <a:cs typeface="Amiri" pitchFamily="2" charset="-78"/>
               </a:rPr>
               <a:t>الصِّيَامُ</a:t>
@@ -34131,6 +34357,7 @@
                   <a:srgbClr val="1B3B6F"/>
                 </a:solidFill>
                 <a:latin typeface="Amiri" pitchFamily="2" charset="-78"/>
+                <a:ea typeface="Amiri" pitchFamily="2" charset="-78"/>
                 <a:cs typeface="Amiri" pitchFamily="2" charset="-78"/>
               </a:rPr>
               <a:t>رَمَضَانُ</a:t>
@@ -34396,6 +34623,7 @@
                   <a:srgbClr val="1B3B6F"/>
                 </a:solidFill>
                 <a:latin typeface="Amiri" pitchFamily="2" charset="-78"/>
+                <a:ea typeface="Amiri" pitchFamily="2" charset="-78"/>
                 <a:cs typeface="Amiri" pitchFamily="2" charset="-78"/>
               </a:rPr>
               <a:t>أَحْتَفِلُ بِالعِيدِ</a:t>
@@ -34553,6 +34781,7 @@
                   <a:srgbClr val="1B3B6F"/>
                 </a:solidFill>
                 <a:latin typeface="Amiri" pitchFamily="2" charset="-78"/>
+                <a:ea typeface="Amiri" pitchFamily="2" charset="-78"/>
                 <a:cs typeface="Amiri" pitchFamily="2" charset="-78"/>
               </a:rPr>
               <a:t>احْتِفَالٌ</a:t>
@@ -34656,6 +34885,7 @@
                   <a:srgbClr val="1B3B6F"/>
                 </a:solidFill>
                 <a:latin typeface="Amiri" pitchFamily="2" charset="-78"/>
+                <a:ea typeface="Amiri" pitchFamily="2" charset="-78"/>
                 <a:cs typeface="Amiri" pitchFamily="2" charset="-78"/>
               </a:rPr>
               <a:t>احْتَفَلْنَا</a:t>
@@ -34921,6 +35151,7 @@
                   <a:srgbClr val="1B3B6F"/>
                 </a:solidFill>
                 <a:latin typeface="Amiri" pitchFamily="2" charset="-78"/>
+                <a:ea typeface="Amiri" pitchFamily="2" charset="-78"/>
                 <a:cs typeface="Amiri" pitchFamily="2" charset="-78"/>
               </a:rPr>
               <a:t>الإِفْطَارُ · السُّحُورُ</a:t>
@@ -35078,6 +35309,7 @@
                   <a:srgbClr val="1B3B6F"/>
                 </a:solidFill>
                 <a:latin typeface="Amiri" pitchFamily="2" charset="-78"/>
+                <a:ea typeface="Amiri" pitchFamily="2" charset="-78"/>
                 <a:cs typeface="Amiri" pitchFamily="2" charset="-78"/>
               </a:rPr>
               <a:t>صَائِمٌ · صَائِمَةٌ</a:t>
@@ -35181,6 +35413,7 @@
                   <a:srgbClr val="1B3B6F"/>
                 </a:solidFill>
                 <a:latin typeface="Amiri" pitchFamily="2" charset="-78"/>
+                <a:ea typeface="Amiri" pitchFamily="2" charset="-78"/>
                 <a:cs typeface="Amiri" pitchFamily="2" charset="-78"/>
               </a:rPr>
               <a:t>أَصُومُ</a:t>
@@ -35446,6 +35679,7 @@
                   <a:srgbClr val="1B3B6F"/>
                 </a:solidFill>
                 <a:latin typeface="Amiri" pitchFamily="2" charset="-78"/>
+                <a:ea typeface="Amiri" pitchFamily="2" charset="-78"/>
                 <a:cs typeface="Amiri" pitchFamily="2" charset="-78"/>
               </a:rPr>
               <a:t>صَلَاةُ العِيدِ</a:t>
@@ -35603,6 +35837,7 @@
                   <a:srgbClr val="1B3B6F"/>
                 </a:solidFill>
                 <a:latin typeface="Amiri" pitchFamily="2" charset="-78"/>
+                <a:ea typeface="Amiri" pitchFamily="2" charset="-78"/>
                 <a:cs typeface="Amiri" pitchFamily="2" charset="-78"/>
               </a:rPr>
               <a:t>الصَّبَاحُ</a:t>
@@ -35706,6 +35941,7 @@
                   <a:srgbClr val="1B3B6F"/>
                 </a:solidFill>
                 <a:latin typeface="Amiri" pitchFamily="2" charset="-78"/>
+                <a:ea typeface="Amiri" pitchFamily="2" charset="-78"/>
                 <a:cs typeface="Amiri" pitchFamily="2" charset="-78"/>
               </a:rPr>
               <a:t>المَسْجِدُ</a:t>
@@ -35971,6 +36207,7 @@
                   <a:srgbClr val="1B3B6F"/>
                 </a:solidFill>
                 <a:latin typeface="Amiri" pitchFamily="2" charset="-78"/>
+                <a:ea typeface="Amiri" pitchFamily="2" charset="-78"/>
                 <a:cs typeface="Amiri" pitchFamily="2" charset="-78"/>
               </a:rPr>
               <a:t>عِيدِيَّةٌ</a:t>
@@ -36128,6 +36365,7 @@
                   <a:srgbClr val="1B3B6F"/>
                 </a:solidFill>
                 <a:latin typeface="Amiri" pitchFamily="2" charset="-78"/>
+                <a:ea typeface="Amiri" pitchFamily="2" charset="-78"/>
                 <a:cs typeface="Amiri" pitchFamily="2" charset="-78"/>
               </a:rPr>
               <a:t>هَدَايَا</a:t>
@@ -36231,6 +36469,7 @@
                   <a:srgbClr val="1B3B6F"/>
                 </a:solidFill>
                 <a:latin typeface="Amiri" pitchFamily="2" charset="-78"/>
+                <a:ea typeface="Amiri" pitchFamily="2" charset="-78"/>
                 <a:cs typeface="Amiri" pitchFamily="2" charset="-78"/>
               </a:rPr>
               <a:t>هَدِيَّةٌ</a:t>
@@ -36364,6 +36603,7 @@
                   <a:srgbClr val="D4AF37"/>
                 </a:solidFill>
                 <a:latin typeface="Amiri" pitchFamily="2" charset="-78"/>
+                <a:ea typeface="Amiri" pitchFamily="2" charset="-78"/>
                 <a:cs typeface="Amiri" pitchFamily="2" charset="-78"/>
               </a:rPr>
               <a:t>م</a:t>
@@ -36684,6 +36924,7 @@
                   <a:srgbClr val="8A6D1E"/>
                 </a:solidFill>
                 <a:latin typeface="Amiri" pitchFamily="2" charset="-78"/>
+                <a:ea typeface="Amiri" pitchFamily="2" charset="-78"/>
                 <a:cs typeface="Amiri" pitchFamily="2" charset="-78"/>
               </a:rPr>
               <a:t>الضَّمَائِرُ المُتَّصِلَةُ بِالفِعْلِ</a:t>
@@ -36987,6 +37228,7 @@
                   <a:srgbClr val="1B3B6F"/>
                 </a:solidFill>
                 <a:latin typeface="Amiri" pitchFamily="2" charset="-78"/>
+                <a:ea typeface="Amiri" pitchFamily="2" charset="-78"/>
                 <a:cs typeface="Amiri" pitchFamily="2" charset="-78"/>
               </a:rPr>
               <a:t>مَلَابِسُ جَدِيدَةٌ</a:t>
@@ -37144,6 +37386,7 @@
                   <a:srgbClr val="1B3B6F"/>
                 </a:solidFill>
                 <a:latin typeface="Amiri" pitchFamily="2" charset="-78"/>
+                <a:ea typeface="Amiri" pitchFamily="2" charset="-78"/>
                 <a:cs typeface="Amiri" pitchFamily="2" charset="-78"/>
               </a:rPr>
               <a:t>اشْتَرَيْتُهَا</a:t>
@@ -37247,6 +37490,7 @@
                   <a:srgbClr val="1B3B6F"/>
                 </a:solidFill>
                 <a:latin typeface="Amiri" pitchFamily="2" charset="-78"/>
+                <a:ea typeface="Amiri" pitchFamily="2" charset="-78"/>
                 <a:cs typeface="Amiri" pitchFamily="2" charset="-78"/>
               </a:rPr>
               <a:t>لَبِسْتُهَا</a:t>
@@ -37512,6 +37756,7 @@
                   <a:srgbClr val="1B3B6F"/>
                 </a:solidFill>
                 <a:latin typeface="Amiri" pitchFamily="2" charset="-78"/>
+                <a:ea typeface="Amiri" pitchFamily="2" charset="-78"/>
                 <a:cs typeface="Amiri" pitchFamily="2" charset="-78"/>
               </a:rPr>
               <a:t>نَزُورُ الأَقَارِبَ</a:t>
@@ -37669,6 +37914,7 @@
                   <a:srgbClr val="1B3B6F"/>
                 </a:solidFill>
                 <a:latin typeface="Amiri" pitchFamily="2" charset="-78"/>
+                <a:ea typeface="Amiri" pitchFamily="2" charset="-78"/>
                 <a:cs typeface="Amiri" pitchFamily="2" charset="-78"/>
               </a:rPr>
               <a:t>زَارُونَا</a:t>
@@ -37772,6 +38018,7 @@
                   <a:srgbClr val="1B3B6F"/>
                 </a:solidFill>
                 <a:latin typeface="Amiri" pitchFamily="2" charset="-78"/>
+                <a:ea typeface="Amiri" pitchFamily="2" charset="-78"/>
                 <a:cs typeface="Amiri" pitchFamily="2" charset="-78"/>
               </a:rPr>
               <a:t>زُرْنَاهُمْ</a:t>
@@ -38037,6 +38284,7 @@
                   <a:srgbClr val="1B3B6F"/>
                 </a:solidFill>
                 <a:latin typeface="Amiri" pitchFamily="2" charset="-78"/>
+                <a:ea typeface="Amiri" pitchFamily="2" charset="-78"/>
                 <a:cs typeface="Amiri" pitchFamily="2" charset="-78"/>
               </a:rPr>
               <a:t>أَوَّلًا · ثُمَّ</a:t>
@@ -38194,6 +38442,7 @@
                   <a:srgbClr val="1B3B6F"/>
                 </a:solidFill>
                 <a:latin typeface="Amiri" pitchFamily="2" charset="-78"/>
+                <a:ea typeface="Amiri" pitchFamily="2" charset="-78"/>
                 <a:cs typeface="Amiri" pitchFamily="2" charset="-78"/>
               </a:rPr>
               <a:t>أَخِيرًا</a:t>
@@ -38297,6 +38546,7 @@
                   <a:srgbClr val="1B3B6F"/>
                 </a:solidFill>
                 <a:latin typeface="Amiri" pitchFamily="2" charset="-78"/>
+                <a:ea typeface="Amiri" pitchFamily="2" charset="-78"/>
                 <a:cs typeface="Amiri" pitchFamily="2" charset="-78"/>
               </a:rPr>
               <a:t>بَعْدَ ذٰلِكَ</a:t>
@@ -38562,6 +38812,7 @@
                   <a:srgbClr val="1B3B6F"/>
                 </a:solidFill>
                 <a:latin typeface="Amiri" pitchFamily="2" charset="-78"/>
+                <a:ea typeface="Amiri" pitchFamily="2" charset="-78"/>
                 <a:cs typeface="Amiri" pitchFamily="2" charset="-78"/>
               </a:rPr>
               <a:t>حَفْلَةُ زِفَافٍ</a:t>
@@ -38719,6 +38970,7 @@
                   <a:srgbClr val="1B3B6F"/>
                 </a:solidFill>
                 <a:latin typeface="Amiri" pitchFamily="2" charset="-78"/>
+                <a:ea typeface="Amiri" pitchFamily="2" charset="-78"/>
                 <a:cs typeface="Amiri" pitchFamily="2" charset="-78"/>
               </a:rPr>
               <a:t>وِلَادَةٌ</a:t>
@@ -38822,6 +39074,7 @@
                   <a:srgbClr val="1B3B6F"/>
                 </a:solidFill>
                 <a:latin typeface="Amiri" pitchFamily="2" charset="-78"/>
+                <a:ea typeface="Amiri" pitchFamily="2" charset="-78"/>
                 <a:cs typeface="Amiri" pitchFamily="2" charset="-78"/>
               </a:rPr>
               <a:t>عَرُوسٌ · عَرِيسٌ</a:t>
@@ -39087,6 +39340,7 @@
                   <a:srgbClr val="1B3B6F"/>
                 </a:solidFill>
                 <a:latin typeface="Amiri" pitchFamily="2" charset="-78"/>
+                <a:ea typeface="Amiri" pitchFamily="2" charset="-78"/>
                 <a:cs typeface="Amiri" pitchFamily="2" charset="-78"/>
               </a:rPr>
               <a:t>أُهَنِّئُ</a:t>
@@ -39244,6 +39498,7 @@
                   <a:srgbClr val="1B3B6F"/>
                 </a:solidFill>
                 <a:latin typeface="Amiri" pitchFamily="2" charset="-78"/>
+                <a:ea typeface="Amiri" pitchFamily="2" charset="-78"/>
                 <a:cs typeface="Amiri" pitchFamily="2" charset="-78"/>
               </a:rPr>
               <a:t>كُلُّ عَامٍ وَأَنْتُمْ بِخَيْرٍ</a:t>
@@ -39347,6 +39602,7 @@
                   <a:srgbClr val="1B3B6F"/>
                 </a:solidFill>
                 <a:latin typeface="Amiri" pitchFamily="2" charset="-78"/>
+                <a:ea typeface="Amiri" pitchFamily="2" charset="-78"/>
                 <a:cs typeface="Amiri" pitchFamily="2" charset="-78"/>
               </a:rPr>
               <a:t>تَهْنِئَةٌ</a:t>
@@ -39612,6 +39868,7 @@
                   <a:srgbClr val="1B3B6F"/>
                 </a:solidFill>
                 <a:latin typeface="Amiri" pitchFamily="2" charset="-78"/>
+                <a:ea typeface="Amiri" pitchFamily="2" charset="-78"/>
                 <a:cs typeface="Amiri" pitchFamily="2" charset="-78"/>
               </a:rPr>
               <a:t>كُنَّا نَحْتَفِلُ</a:t>
@@ -39769,6 +40026,7 @@
                   <a:srgbClr val="1B3B6F"/>
                 </a:solidFill>
                 <a:latin typeface="Amiri" pitchFamily="2" charset="-78"/>
+                <a:ea typeface="Amiri" pitchFamily="2" charset="-78"/>
                 <a:cs typeface="Amiri" pitchFamily="2" charset="-78"/>
               </a:rPr>
               <a:t>أَمَّا اليَوْمَ</a:t>
@@ -39872,6 +40130,7 @@
                   <a:srgbClr val="1B3B6F"/>
                 </a:solidFill>
                 <a:latin typeface="Amiri" pitchFamily="2" charset="-78"/>
+                <a:ea typeface="Amiri" pitchFamily="2" charset="-78"/>
                 <a:cs typeface="Amiri" pitchFamily="2" charset="-78"/>
               </a:rPr>
               <a:t>عِنْدَمَا كُنْتُ صَغِيرًا</a:t>
@@ -40005,6 +40264,7 @@
                   <a:srgbClr val="D4AF37"/>
                 </a:solidFill>
                 <a:latin typeface="Amiri" pitchFamily="2" charset="-78"/>
+                <a:ea typeface="Amiri" pitchFamily="2" charset="-78"/>
                 <a:cs typeface="Amiri" pitchFamily="2" charset="-78"/>
               </a:rPr>
               <a:t>م</a:t>
@@ -40325,6 +40585,7 @@
                   <a:srgbClr val="8A6D1E"/>
                 </a:solidFill>
                 <a:latin typeface="Amiri" pitchFamily="2" charset="-78"/>
+                <a:ea typeface="Amiri" pitchFamily="2" charset="-78"/>
                 <a:cs typeface="Amiri" pitchFamily="2" charset="-78"/>
               </a:rPr>
               <a:t>فِي الغُرَفِ</a:t>
@@ -41501,6 +41762,7 @@
                   <a:srgbClr val="1B3B6F"/>
                 </a:solidFill>
                 <a:latin typeface="Amiri" pitchFamily="2" charset="-78"/>
+                <a:ea typeface="Amiri" pitchFamily="2" charset="-78"/>
                 <a:cs typeface="Amiri" pitchFamily="2" charset="-78"/>
               </a:rPr>
               <a:t>دَوْرُكَ!</a:t>
@@ -41577,6 +41839,7 @@
                   <a:srgbClr val="1B3B6F"/>
                 </a:solidFill>
                 <a:latin typeface="Amiri" pitchFamily="2" charset="-78"/>
+                <a:ea typeface="Amiri" pitchFamily="2" charset="-78"/>
                 <a:cs typeface="Amiri" pitchFamily="2" charset="-78"/>
               </a:rPr>
               <a:t>أَحْسَنْتَ! / أَحْسَنْتِ!</a:t>
@@ -41653,6 +41916,7 @@
                   <a:srgbClr val="1B3B6F"/>
                 </a:solidFill>
                 <a:latin typeface="Amiri" pitchFamily="2" charset="-78"/>
+                <a:ea typeface="Amiri" pitchFamily="2" charset="-78"/>
                 <a:cs typeface="Amiri" pitchFamily="2" charset="-78"/>
               </a:rPr>
               <a:t>تَكَلَّمْ أَكْثَرَ، مِنْ فَضْلِكَ</a:t>
@@ -41729,6 +41993,7 @@
                   <a:srgbClr val="1B3B6F"/>
                 </a:solidFill>
                 <a:latin typeface="Amiri" pitchFamily="2" charset="-78"/>
+                <a:ea typeface="Amiri" pitchFamily="2" charset="-78"/>
                 <a:cs typeface="Amiri" pitchFamily="2" charset="-78"/>
               </a:rPr>
               <a:t>لِمَاذَا؟</a:t>
@@ -41900,6 +42165,7 @@
                   <a:srgbClr val="D4AF37"/>
                 </a:solidFill>
                 <a:latin typeface="Amiri" pitchFamily="2" charset="-78"/>
+                <a:ea typeface="Amiri" pitchFamily="2" charset="-78"/>
                 <a:cs typeface="Amiri" pitchFamily="2" charset="-78"/>
               </a:rPr>
               <a:t>م</a:t>
@@ -42220,6 +42486,7 @@
                   <a:srgbClr val="8A6D1E"/>
                 </a:solidFill>
                 <a:latin typeface="Amiri" pitchFamily="2" charset="-78"/>
+                <a:ea typeface="Amiri" pitchFamily="2" charset="-78"/>
                 <a:cs typeface="Amiri" pitchFamily="2" charset="-78"/>
               </a:rPr>
               <a:t>صَبَاحُ العِيدِ مَعَ الجَارِ</a:t>
@@ -42500,6 +42767,7 @@
                   <a:srgbClr val="1B3B6F"/>
                 </a:solidFill>
                 <a:latin typeface="Amiri" pitchFamily="2" charset="-78"/>
+                <a:ea typeface="Amiri" pitchFamily="2" charset="-78"/>
                 <a:cs typeface="Amiri" pitchFamily="2" charset="-78"/>
               </a:rPr>
               <a:t>شُكْرًا! اليَوْمَ …</a:t>
@@ -42576,6 +42844,7 @@
                   <a:srgbClr val="1B3B6F"/>
                 </a:solidFill>
                 <a:latin typeface="Amiri" pitchFamily="2" charset="-78"/>
+                <a:ea typeface="Amiri" pitchFamily="2" charset="-78"/>
                 <a:cs typeface="Amiri" pitchFamily="2" charset="-78"/>
               </a:rPr>
               <a:t>صَبَاحَ الخَيْرِ! تَبْدُو جَمِيلًا اليَوْمَ!</a:t>
@@ -42744,6 +43013,7 @@
                   <a:srgbClr val="1B3B6F"/>
                 </a:solidFill>
                 <a:latin typeface="Amiri" pitchFamily="2" charset="-78"/>
+                <a:ea typeface="Amiri" pitchFamily="2" charset="-78"/>
                 <a:cs typeface="Amiri" pitchFamily="2" charset="-78"/>
               </a:rPr>
               <a:t>أَوَّلًا … ثُمَّ …</a:t>
@@ -42820,6 +43090,7 @@
                   <a:srgbClr val="1B3B6F"/>
                 </a:solidFill>
                 <a:latin typeface="Amiri" pitchFamily="2" charset="-78"/>
+                <a:ea typeface="Amiri" pitchFamily="2" charset="-78"/>
                 <a:cs typeface="Amiri" pitchFamily="2" charset="-78"/>
               </a:rPr>
               <a:t>مَاذَا تَفْعَلُونَ فِي العِيدِ؟</a:t>
@@ -42988,6 +43259,7 @@
                   <a:srgbClr val="1B3B6F"/>
                 </a:solidFill>
                 <a:latin typeface="Amiri" pitchFamily="2" charset="-78"/>
+                <a:ea typeface="Amiri" pitchFamily="2" charset="-78"/>
                 <a:cs typeface="Amiri" pitchFamily="2" charset="-78"/>
               </a:rPr>
               <a:t>نَأْكُلُ …</a:t>
@@ -43064,6 +43336,7 @@
                   <a:srgbClr val="1B3B6F"/>
                 </a:solidFill>
                 <a:latin typeface="Amiri" pitchFamily="2" charset="-78"/>
+                <a:ea typeface="Amiri" pitchFamily="2" charset="-78"/>
                 <a:cs typeface="Amiri" pitchFamily="2" charset="-78"/>
               </a:rPr>
               <a:t>وَمَاذَا تَأْكُلُونَ؟</a:t>
@@ -43232,6 +43505,7 @@
                   <a:srgbClr val="1B3B6F"/>
                 </a:solidFill>
                 <a:latin typeface="Amiri" pitchFamily="2" charset="-78"/>
+                <a:ea typeface="Amiri" pitchFamily="2" charset="-78"/>
                 <a:cs typeface="Amiri" pitchFamily="2" charset="-78"/>
               </a:rPr>
               <a:t>شُكْرًا! تَفَضَّلْ …</a:t>
@@ -43308,6 +43582,7 @@
                   <a:srgbClr val="1B3B6F"/>
                 </a:solidFill>
                 <a:latin typeface="Amiri" pitchFamily="2" charset="-78"/>
+                <a:ea typeface="Amiri" pitchFamily="2" charset="-78"/>
                 <a:cs typeface="Amiri" pitchFamily="2" charset="-78"/>
               </a:rPr>
               <a:t>لَذِيذٌ! عِيدٌ سَعِيدٌ لَكُمْ.</a:t>
@@ -43476,6 +43751,7 @@
                   <a:srgbClr val="1B3B6F"/>
                 </a:solidFill>
                 <a:latin typeface="Amiri" pitchFamily="2" charset="-78"/>
+                <a:ea typeface="Amiri" pitchFamily="2" charset="-78"/>
                 <a:cs typeface="Amiri" pitchFamily="2" charset="-78"/>
               </a:rPr>
               <a:t>نَعَمْ، آخُذُ … مِنْ …</a:t>
@@ -43552,6 +43828,7 @@
                   <a:srgbClr val="1B3B6F"/>
                 </a:solidFill>
                 <a:latin typeface="Amiri" pitchFamily="2" charset="-78"/>
+                <a:ea typeface="Amiri" pitchFamily="2" charset="-78"/>
                 <a:cs typeface="Amiri" pitchFamily="2" charset="-78"/>
               </a:rPr>
               <a:t>مَا أَلْطَفَكُمْ! هَلْ تَأْخُذُ هَدَايَا فِي العِيدِ؟</a:t>
@@ -43826,6 +44103,7 @@
                   <a:srgbClr val="D4AF37"/>
                 </a:solidFill>
                 <a:latin typeface="Amiri" pitchFamily="2" charset="-78"/>
+                <a:ea typeface="Amiri" pitchFamily="2" charset="-78"/>
                 <a:cs typeface="Amiri" pitchFamily="2" charset="-78"/>
               </a:rPr>
               <a:t>م</a:t>
@@ -44146,6 +44424,7 @@
                   <a:srgbClr val="8A6D1E"/>
                 </a:solidFill>
                 <a:latin typeface="Amiri" pitchFamily="2" charset="-78"/>
+                <a:ea typeface="Amiri" pitchFamily="2" charset="-78"/>
                 <a:cs typeface="Amiri" pitchFamily="2" charset="-78"/>
               </a:rPr>
               <a:t>دَعْوَةٌ إِلَى الإِفْطَارِ</a:t>
@@ -44426,6 +44705,7 @@
                   <a:srgbClr val="1B3B6F"/>
                 </a:solidFill>
                 <a:latin typeface="Amiri" pitchFamily="2" charset="-78"/>
+                <a:ea typeface="Amiri" pitchFamily="2" charset="-78"/>
                 <a:cs typeface="Amiri" pitchFamily="2" charset="-78"/>
               </a:rPr>
               <a:t>نَعَمْ، أَصُومُ … مِنْ … إِلَى …</a:t>
@@ -44502,6 +44782,7 @@
                   <a:srgbClr val="1B3B6F"/>
                 </a:solidFill>
                 <a:latin typeface="Amiri" pitchFamily="2" charset="-78"/>
+                <a:ea typeface="Amiri" pitchFamily="2" charset="-78"/>
                 <a:cs typeface="Amiri" pitchFamily="2" charset="-78"/>
               </a:rPr>
               <a:t>هَلْ أَنْتَ صَائِمٌ اليَوْمَ؟</a:t>
@@ -44670,6 +44951,7 @@
                   <a:srgbClr val="1B3B6F"/>
                 </a:solidFill>
                 <a:latin typeface="Amiri" pitchFamily="2" charset="-78"/>
+                <a:ea typeface="Amiri" pitchFamily="2" charset="-78"/>
                 <a:cs typeface="Amiri" pitchFamily="2" charset="-78"/>
               </a:rPr>
               <a:t>نَأْكُلُ … ؛ هَلْ تُرِيدُ أَنْ …؟</a:t>
@@ -44746,6 +45028,7 @@
                   <a:srgbClr val="1B3B6F"/>
                 </a:solidFill>
                 <a:latin typeface="Amiri" pitchFamily="2" charset="-78"/>
+                <a:ea typeface="Amiri" pitchFamily="2" charset="-78"/>
                 <a:cs typeface="Amiri" pitchFamily="2" charset="-78"/>
               </a:rPr>
               <a:t>وَمَتَى تَأْكُلُ؟</a:t>
@@ -44914,6 +45197,7 @@
                   <a:srgbClr val="1B3B6F"/>
                 </a:solidFill>
                 <a:latin typeface="Amiri" pitchFamily="2" charset="-78"/>
+                <a:ea typeface="Amiri" pitchFamily="2" charset="-78"/>
                 <a:cs typeface="Amiri" pitchFamily="2" charset="-78"/>
               </a:rPr>
               <a:t>فِي بَيْتِنَا … فِي السَّاعَةِ …</a:t>
@@ -44990,6 +45274,7 @@
                   <a:srgbClr val="1B3B6F"/>
                 </a:solidFill>
                 <a:latin typeface="Amiri" pitchFamily="2" charset="-78"/>
+                <a:ea typeface="Amiri" pitchFamily="2" charset="-78"/>
                 <a:cs typeface="Amiri" pitchFamily="2" charset="-78"/>
               </a:rPr>
               <a:t>بِكُلِّ سُرُورٍ! مَتَى وَأَيْنَ؟</a:t>
@@ -45093,6 +45378,7 @@
                   <a:srgbClr val="1B3B6F"/>
                 </a:solidFill>
                 <a:latin typeface="Amiri" pitchFamily="2" charset="-78"/>
+                <a:ea typeface="Amiri" pitchFamily="2" charset="-78"/>
                 <a:cs typeface="Amiri" pitchFamily="2" charset="-78"/>
               </a:rPr>
               <a:t>لَا شَيْءَ! … وَأَنْتَ، كَيْفَ تَحْتَفِلُونَ بِعِيدِ …؟</a:t>
@@ -45169,6 +45455,7 @@
                   <a:srgbClr val="1B3B6F"/>
                 </a:solidFill>
                 <a:latin typeface="Amiri" pitchFamily="2" charset="-78"/>
+                <a:ea typeface="Amiri" pitchFamily="2" charset="-78"/>
                 <a:cs typeface="Amiri" pitchFamily="2" charset="-78"/>
               </a:rPr>
               <a:t>مَاذَا أُحْضِرُ مَعِي؟</a:t>
@@ -45272,6 +45559,7 @@
                   <a:srgbClr val="1B3B6F"/>
                 </a:solidFill>
                 <a:latin typeface="Amiri" pitchFamily="2" charset="-78"/>
+                <a:ea typeface="Amiri" pitchFamily="2" charset="-78"/>
                 <a:cs typeface="Amiri" pitchFamily="2" charset="-78"/>
               </a:rPr>
               <a:t>صَعْبٌ قَلِيلًا، لٰكِنَّهُ …</a:t>
@@ -45348,6 +45636,7 @@
                   <a:srgbClr val="1B3B6F"/>
                 </a:solidFill>
                 <a:latin typeface="Amiri" pitchFamily="2" charset="-78"/>
+                <a:ea typeface="Amiri" pitchFamily="2" charset="-78"/>
                 <a:cs typeface="Amiri" pitchFamily="2" charset="-78"/>
               </a:rPr>
               <a:t>نَتَبَادَلُ الهَدَايَا. أَلَيْسَ الصِّيَامُ صَعْبًا؟</a:t>
@@ -45522,13 +45811,9 @@
     <a:fontScheme name="Office">
       <a:majorFont>
         <a:latin typeface="Calibri Light" panose="020F0302020204030204"/>
-        <a:ea typeface=""/>
-        <a:cs typeface=""/>
-        <a:font script="Jpan" typeface="游ゴシック Light"/>
-        <a:font script="Hang" typeface="맑은 고딕"/>
-        <a:font script="Hans" typeface="等线 Light"/>
-        <a:font script="Hant" typeface="新細明體"/>
-        <a:font script="Arab" typeface="Times New Roman"/>
+        <a:ea typeface="Amiri" pitchFamily="2" charset="-78"/>
+        <a:cs typeface="Amiri" pitchFamily="2" charset="-78"/>
+        <a:font script="Arab" typeface="Amiri"/>
         <a:font script="Hebr" typeface="Times New Roman"/>
         <a:font script="Thai" typeface="Angsana New"/>
         <a:font script="Ethi" typeface="Nyala"/>
@@ -45574,13 +45859,9 @@
       </a:majorFont>
       <a:minorFont>
         <a:latin typeface="Calibri" panose="020F0502020204030204"/>
-        <a:ea typeface=""/>
-        <a:cs typeface=""/>
-        <a:font script="Jpan" typeface="游ゴシック"/>
-        <a:font script="Hang" typeface="맑은 고딕"/>
-        <a:font script="Hans" typeface="等线"/>
-        <a:font script="Hant" typeface="新細明體"/>
-        <a:font script="Arab" typeface="Arial"/>
+        <a:ea typeface="Amiri" pitchFamily="2" charset="-78"/>
+        <a:cs typeface="Amiri" pitchFamily="2" charset="-78"/>
+        <a:font script="Arab" typeface="Amiri"/>
         <a:font script="Hebr" typeface="Arial"/>
         <a:font script="Thai" typeface="Cordia New"/>
         <a:font script="Ethi" typeface="Nyala"/>
